--- a/04-backend-seguranca/apresentacao-backend-seguranca.pptx
+++ b/04-backend-seguranca/apresentacao-backend-seguranca.pptx
@@ -5,10 +5,11 @@
     <p:sldMasterId id="2147483648" r:id="rId1"/>
   </p:sldMasterIdLst>
   <p:sldIdLst>
-    <p:sldId id="256" r:id="rId7"/>
-    <p:sldId id="257" r:id="rId8"/>
+    <p:sldId id="256" r:id="rId2"/>
+    <p:sldId id="257" r:id="rId3"/>
+    <p:sldId id="258" r:id="rId4"/>
   </p:sldIdLst>
-  <p:sldSz cx="12191695" cy="6858000" type="screen4x3"/>
+  <p:sldSz cx="12192000" cy="6858000"/>
   <p:notesSz cx="6858000" cy="9144000"/>
   <p:defaultTextStyle>
     <a:defPPr>
@@ -105,6 +106,22 @@
       </a:defRPr>
     </a:lvl9pPr>
   </p:defaultTextStyle>
+  <p:extLst>
+    <p:ext uri="{EFAFB233-063F-42B5-8137-9DF3F51BA10A}">
+      <p15:sldGuideLst xmlns:p15="http://schemas.microsoft.com/office/powerpoint/2012/main">
+        <p15:guide id="1" orient="horz" pos="2160">
+          <p15:clr>
+            <a:srgbClr val="A4A3A4"/>
+          </p15:clr>
+        </p15:guide>
+        <p15:guide id="2" pos="2880">
+          <p15:clr>
+            <a:srgbClr val="A4A3A4"/>
+          </p15:clr>
+        </p15:guide>
+      </p15:sldGuideLst>
+    </p:ext>
+  </p:extLst>
 </p:presentation>
 </file>
 
@@ -146,10 +163,9 @@
           <a:lstStyle/>
           <a:p>
             <a:r>
-              <a:rPr lang="en-US" smtClean="0"/>
+              <a:rPr lang="en-US"/>
               <a:t>Click to edit Master title style</a:t>
             </a:r>
-            <a:endParaRPr lang="en-US"/>
           </a:p>
         </p:txBody>
       </p:sp>
@@ -265,10 +281,9 @@
           </a:lstStyle>
           <a:p>
             <a:r>
-              <a:rPr lang="en-US" smtClean="0"/>
+              <a:rPr lang="en-US"/>
               <a:t>Click to edit Master subtitle style</a:t>
             </a:r>
-            <a:endParaRPr lang="en-US"/>
           </a:p>
         </p:txBody>
       </p:sp>
@@ -289,7 +304,7 @@
           <a:p>
             <a:fld id="{5BCAD085-E8A6-8845-BD4E-CB4CCA059FC4}" type="datetimeFigureOut">
               <a:rPr lang="en-US" smtClean="0"/>
-              <a:t>1/27/13</a:t>
+              <a:t>9/17/2026</a:t>
             </a:fld>
             <a:endParaRPr lang="en-US"/>
           </a:p>
@@ -331,7 +346,7 @@
           <a:p>
             <a:fld id="{C1FF6DA9-008F-8B48-92A6-B652298478BF}" type="slidenum">
               <a:rPr lang="en-US" smtClean="0"/>
-              <a:t>‹#›</a:t>
+              <a:t>‹nº›</a:t>
             </a:fld>
             <a:endParaRPr lang="en-US"/>
           </a:p>
@@ -383,10 +398,9 @@
           <a:lstStyle/>
           <a:p>
             <a:r>
-              <a:rPr lang="en-US" smtClean="0"/>
+              <a:rPr lang="en-US"/>
               <a:t>Click to edit Master title style</a:t>
             </a:r>
-            <a:endParaRPr lang="en-US"/>
           </a:p>
         </p:txBody>
       </p:sp>
@@ -407,38 +421,37 @@
           <a:p>
             <a:pPr lvl="0"/>
             <a:r>
-              <a:rPr lang="en-US" smtClean="0"/>
+              <a:rPr lang="en-US"/>
               <a:t>Click to edit Master text styles</a:t>
             </a:r>
           </a:p>
           <a:p>
             <a:pPr lvl="1"/>
             <a:r>
-              <a:rPr lang="en-US" smtClean="0"/>
+              <a:rPr lang="en-US"/>
               <a:t>Second level</a:t>
             </a:r>
           </a:p>
           <a:p>
             <a:pPr lvl="2"/>
             <a:r>
-              <a:rPr lang="en-US" smtClean="0"/>
+              <a:rPr lang="en-US"/>
               <a:t>Third level</a:t>
             </a:r>
           </a:p>
           <a:p>
             <a:pPr lvl="3"/>
             <a:r>
-              <a:rPr lang="en-US" smtClean="0"/>
+              <a:rPr lang="en-US"/>
               <a:t>Fourth level</a:t>
             </a:r>
           </a:p>
           <a:p>
             <a:pPr lvl="4"/>
             <a:r>
-              <a:rPr lang="en-US" smtClean="0"/>
+              <a:rPr lang="en-US"/>
               <a:t>Fifth level</a:t>
             </a:r>
-            <a:endParaRPr lang="en-US"/>
           </a:p>
         </p:txBody>
       </p:sp>
@@ -459,7 +472,7 @@
           <a:p>
             <a:fld id="{5BCAD085-E8A6-8845-BD4E-CB4CCA059FC4}" type="datetimeFigureOut">
               <a:rPr lang="en-US" smtClean="0"/>
-              <a:t>1/27/13</a:t>
+              <a:t>9/17/2026</a:t>
             </a:fld>
             <a:endParaRPr lang="en-US"/>
           </a:p>
@@ -501,7 +514,7 @@
           <a:p>
             <a:fld id="{C1FF6DA9-008F-8B48-92A6-B652298478BF}" type="slidenum">
               <a:rPr lang="en-US" smtClean="0"/>
-              <a:t>‹#›</a:t>
+              <a:t>‹nº›</a:t>
             </a:fld>
             <a:endParaRPr lang="en-US"/>
           </a:p>
@@ -558,10 +571,9 @@
           <a:lstStyle/>
           <a:p>
             <a:r>
-              <a:rPr lang="en-US" smtClean="0"/>
+              <a:rPr lang="en-US"/>
               <a:t>Click to edit Master title style</a:t>
             </a:r>
-            <a:endParaRPr lang="en-US"/>
           </a:p>
         </p:txBody>
       </p:sp>
@@ -587,38 +599,37 @@
           <a:p>
             <a:pPr lvl="0"/>
             <a:r>
-              <a:rPr lang="en-US" smtClean="0"/>
+              <a:rPr lang="en-US"/>
               <a:t>Click to edit Master text styles</a:t>
             </a:r>
           </a:p>
           <a:p>
             <a:pPr lvl="1"/>
             <a:r>
-              <a:rPr lang="en-US" smtClean="0"/>
+              <a:rPr lang="en-US"/>
               <a:t>Second level</a:t>
             </a:r>
           </a:p>
           <a:p>
             <a:pPr lvl="2"/>
             <a:r>
-              <a:rPr lang="en-US" smtClean="0"/>
+              <a:rPr lang="en-US"/>
               <a:t>Third level</a:t>
             </a:r>
           </a:p>
           <a:p>
             <a:pPr lvl="3"/>
             <a:r>
-              <a:rPr lang="en-US" smtClean="0"/>
+              <a:rPr lang="en-US"/>
               <a:t>Fourth level</a:t>
             </a:r>
           </a:p>
           <a:p>
             <a:pPr lvl="4"/>
             <a:r>
-              <a:rPr lang="en-US" smtClean="0"/>
+              <a:rPr lang="en-US"/>
               <a:t>Fifth level</a:t>
             </a:r>
-            <a:endParaRPr lang="en-US"/>
           </a:p>
         </p:txBody>
       </p:sp>
@@ -639,7 +650,7 @@
           <a:p>
             <a:fld id="{5BCAD085-E8A6-8845-BD4E-CB4CCA059FC4}" type="datetimeFigureOut">
               <a:rPr lang="en-US" smtClean="0"/>
-              <a:t>1/27/13</a:t>
+              <a:t>9/17/2026</a:t>
             </a:fld>
             <a:endParaRPr lang="en-US"/>
           </a:p>
@@ -681,7 +692,7 @@
           <a:p>
             <a:fld id="{C1FF6DA9-008F-8B48-92A6-B652298478BF}" type="slidenum">
               <a:rPr lang="en-US" smtClean="0"/>
-              <a:t>‹#›</a:t>
+              <a:t>‹nº›</a:t>
             </a:fld>
             <a:endParaRPr lang="en-US"/>
           </a:p>
@@ -733,10 +744,9 @@
           <a:lstStyle/>
           <a:p>
             <a:r>
-              <a:rPr lang="en-US" smtClean="0"/>
+              <a:rPr lang="en-US"/>
               <a:t>Click to edit Master title style</a:t>
             </a:r>
-            <a:endParaRPr lang="en-US"/>
           </a:p>
         </p:txBody>
       </p:sp>
@@ -757,38 +767,37 @@
           <a:p>
             <a:pPr lvl="0"/>
             <a:r>
-              <a:rPr lang="en-US" smtClean="0"/>
+              <a:rPr lang="en-US"/>
               <a:t>Click to edit Master text styles</a:t>
             </a:r>
           </a:p>
           <a:p>
             <a:pPr lvl="1"/>
             <a:r>
-              <a:rPr lang="en-US" smtClean="0"/>
+              <a:rPr lang="en-US"/>
               <a:t>Second level</a:t>
             </a:r>
           </a:p>
           <a:p>
             <a:pPr lvl="2"/>
             <a:r>
-              <a:rPr lang="en-US" smtClean="0"/>
+              <a:rPr lang="en-US"/>
               <a:t>Third level</a:t>
             </a:r>
           </a:p>
           <a:p>
             <a:pPr lvl="3"/>
             <a:r>
-              <a:rPr lang="en-US" smtClean="0"/>
+              <a:rPr lang="en-US"/>
               <a:t>Fourth level</a:t>
             </a:r>
           </a:p>
           <a:p>
             <a:pPr lvl="4"/>
             <a:r>
-              <a:rPr lang="en-US" smtClean="0"/>
+              <a:rPr lang="en-US"/>
               <a:t>Fifth level</a:t>
             </a:r>
-            <a:endParaRPr lang="en-US"/>
           </a:p>
         </p:txBody>
       </p:sp>
@@ -809,7 +818,7 @@
           <a:p>
             <a:fld id="{5BCAD085-E8A6-8845-BD4E-CB4CCA059FC4}" type="datetimeFigureOut">
               <a:rPr lang="en-US" smtClean="0"/>
-              <a:t>1/27/13</a:t>
+              <a:t>9/17/2026</a:t>
             </a:fld>
             <a:endParaRPr lang="en-US"/>
           </a:p>
@@ -851,7 +860,7 @@
           <a:p>
             <a:fld id="{C1FF6DA9-008F-8B48-92A6-B652298478BF}" type="slidenum">
               <a:rPr lang="en-US" smtClean="0"/>
-              <a:t>‹#›</a:t>
+              <a:t>‹nº›</a:t>
             </a:fld>
             <a:endParaRPr lang="en-US"/>
           </a:p>
@@ -912,10 +921,9 @@
           </a:lstStyle>
           <a:p>
             <a:r>
-              <a:rPr lang="en-US" smtClean="0"/>
+              <a:rPr lang="en-US"/>
               <a:t>Click to edit Master title style</a:t>
             </a:r>
-            <a:endParaRPr lang="en-US"/>
           </a:p>
         </p:txBody>
       </p:sp>
@@ -1032,7 +1040,7 @@
           <a:p>
             <a:pPr lvl="0"/>
             <a:r>
-              <a:rPr lang="en-US" smtClean="0"/>
+              <a:rPr lang="en-US"/>
               <a:t>Click to edit Master text styles</a:t>
             </a:r>
           </a:p>
@@ -1055,7 +1063,7 @@
           <a:p>
             <a:fld id="{5BCAD085-E8A6-8845-BD4E-CB4CCA059FC4}" type="datetimeFigureOut">
               <a:rPr lang="en-US" smtClean="0"/>
-              <a:t>1/27/13</a:t>
+              <a:t>9/17/2026</a:t>
             </a:fld>
             <a:endParaRPr lang="en-US"/>
           </a:p>
@@ -1097,7 +1105,7 @@
           <a:p>
             <a:fld id="{C1FF6DA9-008F-8B48-92A6-B652298478BF}" type="slidenum">
               <a:rPr lang="en-US" smtClean="0"/>
-              <a:t>‹#›</a:t>
+              <a:t>‹nº›</a:t>
             </a:fld>
             <a:endParaRPr lang="en-US"/>
           </a:p>
@@ -1149,10 +1157,9 @@
           <a:lstStyle/>
           <a:p>
             <a:r>
-              <a:rPr lang="en-US" smtClean="0"/>
+              <a:rPr lang="en-US"/>
               <a:t>Click to edit Master title style</a:t>
             </a:r>
-            <a:endParaRPr lang="en-US"/>
           </a:p>
         </p:txBody>
       </p:sp>
@@ -1206,38 +1213,37 @@
           <a:p>
             <a:pPr lvl="0"/>
             <a:r>
-              <a:rPr lang="en-US" smtClean="0"/>
+              <a:rPr lang="en-US"/>
               <a:t>Click to edit Master text styles</a:t>
             </a:r>
           </a:p>
           <a:p>
             <a:pPr lvl="1"/>
             <a:r>
-              <a:rPr lang="en-US" smtClean="0"/>
+              <a:rPr lang="en-US"/>
               <a:t>Second level</a:t>
             </a:r>
           </a:p>
           <a:p>
             <a:pPr lvl="2"/>
             <a:r>
-              <a:rPr lang="en-US" smtClean="0"/>
+              <a:rPr lang="en-US"/>
               <a:t>Third level</a:t>
             </a:r>
           </a:p>
           <a:p>
             <a:pPr lvl="3"/>
             <a:r>
-              <a:rPr lang="en-US" smtClean="0"/>
+              <a:rPr lang="en-US"/>
               <a:t>Fourth level</a:t>
             </a:r>
           </a:p>
           <a:p>
             <a:pPr lvl="4"/>
             <a:r>
-              <a:rPr lang="en-US" smtClean="0"/>
+              <a:rPr lang="en-US"/>
               <a:t>Fifth level</a:t>
             </a:r>
-            <a:endParaRPr lang="en-US"/>
           </a:p>
         </p:txBody>
       </p:sp>
@@ -1291,38 +1297,37 @@
           <a:p>
             <a:pPr lvl="0"/>
             <a:r>
-              <a:rPr lang="en-US" smtClean="0"/>
+              <a:rPr lang="en-US"/>
               <a:t>Click to edit Master text styles</a:t>
             </a:r>
           </a:p>
           <a:p>
             <a:pPr lvl="1"/>
             <a:r>
-              <a:rPr lang="en-US" smtClean="0"/>
+              <a:rPr lang="en-US"/>
               <a:t>Second level</a:t>
             </a:r>
           </a:p>
           <a:p>
             <a:pPr lvl="2"/>
             <a:r>
-              <a:rPr lang="en-US" smtClean="0"/>
+              <a:rPr lang="en-US"/>
               <a:t>Third level</a:t>
             </a:r>
           </a:p>
           <a:p>
             <a:pPr lvl="3"/>
             <a:r>
-              <a:rPr lang="en-US" smtClean="0"/>
+              <a:rPr lang="en-US"/>
               <a:t>Fourth level</a:t>
             </a:r>
           </a:p>
           <a:p>
             <a:pPr lvl="4"/>
             <a:r>
-              <a:rPr lang="en-US" smtClean="0"/>
+              <a:rPr lang="en-US"/>
               <a:t>Fifth level</a:t>
             </a:r>
-            <a:endParaRPr lang="en-US"/>
           </a:p>
         </p:txBody>
       </p:sp>
@@ -1343,7 +1348,7 @@
           <a:p>
             <a:fld id="{5BCAD085-E8A6-8845-BD4E-CB4CCA059FC4}" type="datetimeFigureOut">
               <a:rPr lang="en-US" smtClean="0"/>
-              <a:t>1/27/13</a:t>
+              <a:t>9/17/2026</a:t>
             </a:fld>
             <a:endParaRPr lang="en-US"/>
           </a:p>
@@ -1385,7 +1390,7 @@
           <a:p>
             <a:fld id="{C1FF6DA9-008F-8B48-92A6-B652298478BF}" type="slidenum">
               <a:rPr lang="en-US" smtClean="0"/>
-              <a:t>‹#›</a:t>
+              <a:t>‹nº›</a:t>
             </a:fld>
             <a:endParaRPr lang="en-US"/>
           </a:p>
@@ -1441,10 +1446,9 @@
           </a:lstStyle>
           <a:p>
             <a:r>
-              <a:rPr lang="en-US" smtClean="0"/>
+              <a:rPr lang="en-US"/>
               <a:t>Click to edit Master title style</a:t>
             </a:r>
-            <a:endParaRPr lang="en-US"/>
           </a:p>
         </p:txBody>
       </p:sp>
@@ -1507,7 +1511,7 @@
           <a:p>
             <a:pPr lvl="0"/>
             <a:r>
-              <a:rPr lang="en-US" smtClean="0"/>
+              <a:rPr lang="en-US"/>
               <a:t>Click to edit Master text styles</a:t>
             </a:r>
           </a:p>
@@ -1563,38 +1567,37 @@
           <a:p>
             <a:pPr lvl="0"/>
             <a:r>
-              <a:rPr lang="en-US" smtClean="0"/>
+              <a:rPr lang="en-US"/>
               <a:t>Click to edit Master text styles</a:t>
             </a:r>
           </a:p>
           <a:p>
             <a:pPr lvl="1"/>
             <a:r>
-              <a:rPr lang="en-US" smtClean="0"/>
+              <a:rPr lang="en-US"/>
               <a:t>Second level</a:t>
             </a:r>
           </a:p>
           <a:p>
             <a:pPr lvl="2"/>
             <a:r>
-              <a:rPr lang="en-US" smtClean="0"/>
+              <a:rPr lang="en-US"/>
               <a:t>Third level</a:t>
             </a:r>
           </a:p>
           <a:p>
             <a:pPr lvl="3"/>
             <a:r>
-              <a:rPr lang="en-US" smtClean="0"/>
+              <a:rPr lang="en-US"/>
               <a:t>Fourth level</a:t>
             </a:r>
           </a:p>
           <a:p>
             <a:pPr lvl="4"/>
             <a:r>
-              <a:rPr lang="en-US" smtClean="0"/>
+              <a:rPr lang="en-US"/>
               <a:t>Fifth level</a:t>
             </a:r>
-            <a:endParaRPr lang="en-US"/>
           </a:p>
         </p:txBody>
       </p:sp>
@@ -1657,7 +1660,7 @@
           <a:p>
             <a:pPr lvl="0"/>
             <a:r>
-              <a:rPr lang="en-US" smtClean="0"/>
+              <a:rPr lang="en-US"/>
               <a:t>Click to edit Master text styles</a:t>
             </a:r>
           </a:p>
@@ -1713,38 +1716,37 @@
           <a:p>
             <a:pPr lvl="0"/>
             <a:r>
-              <a:rPr lang="en-US" smtClean="0"/>
+              <a:rPr lang="en-US"/>
               <a:t>Click to edit Master text styles</a:t>
             </a:r>
           </a:p>
           <a:p>
             <a:pPr lvl="1"/>
             <a:r>
-              <a:rPr lang="en-US" smtClean="0"/>
+              <a:rPr lang="en-US"/>
               <a:t>Second level</a:t>
             </a:r>
           </a:p>
           <a:p>
             <a:pPr lvl="2"/>
             <a:r>
-              <a:rPr lang="en-US" smtClean="0"/>
+              <a:rPr lang="en-US"/>
               <a:t>Third level</a:t>
             </a:r>
           </a:p>
           <a:p>
             <a:pPr lvl="3"/>
             <a:r>
-              <a:rPr lang="en-US" smtClean="0"/>
+              <a:rPr lang="en-US"/>
               <a:t>Fourth level</a:t>
             </a:r>
           </a:p>
           <a:p>
             <a:pPr lvl="4"/>
             <a:r>
-              <a:rPr lang="en-US" smtClean="0"/>
+              <a:rPr lang="en-US"/>
               <a:t>Fifth level</a:t>
             </a:r>
-            <a:endParaRPr lang="en-US"/>
           </a:p>
         </p:txBody>
       </p:sp>
@@ -1765,7 +1767,7 @@
           <a:p>
             <a:fld id="{5BCAD085-E8A6-8845-BD4E-CB4CCA059FC4}" type="datetimeFigureOut">
               <a:rPr lang="en-US" smtClean="0"/>
-              <a:t>1/27/13</a:t>
+              <a:t>9/17/2026</a:t>
             </a:fld>
             <a:endParaRPr lang="en-US"/>
           </a:p>
@@ -1807,7 +1809,7 @@
           <a:p>
             <a:fld id="{C1FF6DA9-008F-8B48-92A6-B652298478BF}" type="slidenum">
               <a:rPr lang="en-US" smtClean="0"/>
-              <a:t>‹#›</a:t>
+              <a:t>‹nº›</a:t>
             </a:fld>
             <a:endParaRPr lang="en-US"/>
           </a:p>
@@ -1859,10 +1861,9 @@
           <a:lstStyle/>
           <a:p>
             <a:r>
-              <a:rPr lang="en-US" smtClean="0"/>
+              <a:rPr lang="en-US"/>
               <a:t>Click to edit Master title style</a:t>
             </a:r>
-            <a:endParaRPr lang="en-US"/>
           </a:p>
         </p:txBody>
       </p:sp>
@@ -1883,7 +1884,7 @@
           <a:p>
             <a:fld id="{5BCAD085-E8A6-8845-BD4E-CB4CCA059FC4}" type="datetimeFigureOut">
               <a:rPr lang="en-US" smtClean="0"/>
-              <a:t>1/27/13</a:t>
+              <a:t>9/17/2026</a:t>
             </a:fld>
             <a:endParaRPr lang="en-US"/>
           </a:p>
@@ -1925,7 +1926,7 @@
           <a:p>
             <a:fld id="{C1FF6DA9-008F-8B48-92A6-B652298478BF}" type="slidenum">
               <a:rPr lang="en-US" smtClean="0"/>
-              <a:t>‹#›</a:t>
+              <a:t>‹nº›</a:t>
             </a:fld>
             <a:endParaRPr lang="en-US"/>
           </a:p>
@@ -1978,7 +1979,7 @@
           <a:p>
             <a:fld id="{5BCAD085-E8A6-8845-BD4E-CB4CCA059FC4}" type="datetimeFigureOut">
               <a:rPr lang="en-US" smtClean="0"/>
-              <a:t>1/27/13</a:t>
+              <a:t>9/17/2026</a:t>
             </a:fld>
             <a:endParaRPr lang="en-US"/>
           </a:p>
@@ -2020,7 +2021,7 @@
           <a:p>
             <a:fld id="{C1FF6DA9-008F-8B48-92A6-B652298478BF}" type="slidenum">
               <a:rPr lang="en-US" smtClean="0"/>
-              <a:t>‹#›</a:t>
+              <a:t>‹nº›</a:t>
             </a:fld>
             <a:endParaRPr lang="en-US"/>
           </a:p>
@@ -2081,10 +2082,9 @@
           </a:lstStyle>
           <a:p>
             <a:r>
-              <a:rPr lang="en-US" smtClean="0"/>
+              <a:rPr lang="en-US"/>
               <a:t>Click to edit Master title style</a:t>
             </a:r>
-            <a:endParaRPr lang="en-US"/>
           </a:p>
         </p:txBody>
       </p:sp>
@@ -2138,38 +2138,37 @@
           <a:p>
             <a:pPr lvl="0"/>
             <a:r>
-              <a:rPr lang="en-US" smtClean="0"/>
+              <a:rPr lang="en-US"/>
               <a:t>Click to edit Master text styles</a:t>
             </a:r>
           </a:p>
           <a:p>
             <a:pPr lvl="1"/>
             <a:r>
-              <a:rPr lang="en-US" smtClean="0"/>
+              <a:rPr lang="en-US"/>
               <a:t>Second level</a:t>
             </a:r>
           </a:p>
           <a:p>
             <a:pPr lvl="2"/>
             <a:r>
-              <a:rPr lang="en-US" smtClean="0"/>
+              <a:rPr lang="en-US"/>
               <a:t>Third level</a:t>
             </a:r>
           </a:p>
           <a:p>
             <a:pPr lvl="3"/>
             <a:r>
-              <a:rPr lang="en-US" smtClean="0"/>
+              <a:rPr lang="en-US"/>
               <a:t>Fourth level</a:t>
             </a:r>
           </a:p>
           <a:p>
             <a:pPr lvl="4"/>
             <a:r>
-              <a:rPr lang="en-US" smtClean="0"/>
+              <a:rPr lang="en-US"/>
               <a:t>Fifth level</a:t>
             </a:r>
-            <a:endParaRPr lang="en-US"/>
           </a:p>
         </p:txBody>
       </p:sp>
@@ -2232,7 +2231,7 @@
           <a:p>
             <a:pPr lvl="0"/>
             <a:r>
-              <a:rPr lang="en-US" smtClean="0"/>
+              <a:rPr lang="en-US"/>
               <a:t>Click to edit Master text styles</a:t>
             </a:r>
           </a:p>
@@ -2255,7 +2254,7 @@
           <a:p>
             <a:fld id="{5BCAD085-E8A6-8845-BD4E-CB4CCA059FC4}" type="datetimeFigureOut">
               <a:rPr lang="en-US" smtClean="0"/>
-              <a:t>1/27/13</a:t>
+              <a:t>9/17/2026</a:t>
             </a:fld>
             <a:endParaRPr lang="en-US"/>
           </a:p>
@@ -2297,7 +2296,7 @@
           <a:p>
             <a:fld id="{C1FF6DA9-008F-8B48-92A6-B652298478BF}" type="slidenum">
               <a:rPr lang="en-US" smtClean="0"/>
-              <a:t>‹#›</a:t>
+              <a:t>‹nº›</a:t>
             </a:fld>
             <a:endParaRPr lang="en-US"/>
           </a:p>
@@ -2358,10 +2357,9 @@
           </a:lstStyle>
           <a:p>
             <a:r>
-              <a:rPr lang="en-US" smtClean="0"/>
+              <a:rPr lang="en-US"/>
               <a:t>Click to edit Master title style</a:t>
             </a:r>
-            <a:endParaRPr lang="en-US"/>
           </a:p>
         </p:txBody>
       </p:sp>
@@ -2485,7 +2483,7 @@
           <a:p>
             <a:pPr lvl="0"/>
             <a:r>
-              <a:rPr lang="en-US" smtClean="0"/>
+              <a:rPr lang="en-US"/>
               <a:t>Click to edit Master text styles</a:t>
             </a:r>
           </a:p>
@@ -2508,7 +2506,7 @@
           <a:p>
             <a:fld id="{5BCAD085-E8A6-8845-BD4E-CB4CCA059FC4}" type="datetimeFigureOut">
               <a:rPr lang="en-US" smtClean="0"/>
-              <a:t>1/27/13</a:t>
+              <a:t>9/17/2026</a:t>
             </a:fld>
             <a:endParaRPr lang="en-US"/>
           </a:p>
@@ -2550,7 +2548,7 @@
           <a:p>
             <a:fld id="{C1FF6DA9-008F-8B48-92A6-B652298478BF}" type="slidenum">
               <a:rPr lang="en-US" smtClean="0"/>
-              <a:t>‹#›</a:t>
+              <a:t>‹nº›</a:t>
             </a:fld>
             <a:endParaRPr lang="en-US"/>
           </a:p>
@@ -2617,10 +2615,9 @@
           <a:lstStyle/>
           <a:p>
             <a:r>
-              <a:rPr lang="en-US" smtClean="0"/>
+              <a:rPr lang="en-US"/>
               <a:t>Click to edit Master title style</a:t>
             </a:r>
-            <a:endParaRPr lang="en-US"/>
           </a:p>
         </p:txBody>
       </p:sp>
@@ -2651,38 +2648,37 @@
           <a:p>
             <a:pPr lvl="0"/>
             <a:r>
-              <a:rPr lang="en-US" smtClean="0"/>
+              <a:rPr lang="en-US"/>
               <a:t>Click to edit Master text styles</a:t>
             </a:r>
           </a:p>
           <a:p>
             <a:pPr lvl="1"/>
             <a:r>
-              <a:rPr lang="en-US" smtClean="0"/>
+              <a:rPr lang="en-US"/>
               <a:t>Second level</a:t>
             </a:r>
           </a:p>
           <a:p>
             <a:pPr lvl="2"/>
             <a:r>
-              <a:rPr lang="en-US" smtClean="0"/>
+              <a:rPr lang="en-US"/>
               <a:t>Third level</a:t>
             </a:r>
           </a:p>
           <a:p>
             <a:pPr lvl="3"/>
             <a:r>
-              <a:rPr lang="en-US" smtClean="0"/>
+              <a:rPr lang="en-US"/>
               <a:t>Fourth level</a:t>
             </a:r>
           </a:p>
           <a:p>
             <a:pPr lvl="4"/>
             <a:r>
-              <a:rPr lang="en-US" smtClean="0"/>
+              <a:rPr lang="en-US"/>
               <a:t>Fifth level</a:t>
             </a:r>
-            <a:endParaRPr lang="en-US"/>
           </a:p>
         </p:txBody>
       </p:sp>
@@ -2721,7 +2717,7 @@
           <a:p>
             <a:fld id="{5BCAD085-E8A6-8845-BD4E-CB4CCA059FC4}" type="datetimeFigureOut">
               <a:rPr lang="en-US" smtClean="0"/>
-              <a:t>1/27/13</a:t>
+              <a:t>9/17/2026</a:t>
             </a:fld>
             <a:endParaRPr lang="en-US"/>
           </a:p>
@@ -2799,7 +2795,7 @@
           <a:p>
             <a:fld id="{C1FF6DA9-008F-8B48-92A6-B652298478BF}" type="slidenum">
               <a:rPr lang="en-US" smtClean="0"/>
-              <a:t>‹#›</a:t>
+              <a:t>‹nº›</a:t>
             </a:fld>
             <a:endParaRPr lang="en-US"/>
           </a:p>
@@ -3080,25 +3076,84 @@
 </file>
 
 <file path=ppt/slides/slide1.xml><?xml version="1.0" encoding="utf-8"?>
-<p:sld xmlns:a="http://schemas.openxmlformats.org/drawingml/2006/main" xmlns:p="http://schemas.openxmlformats.org/presentationml/2006/main" xmlns:r="http://schemas.openxmlformats.org/officeDocument/2006/relationships">
+<p:sld xmlns:a="http://schemas.openxmlformats.org/drawingml/2006/main" xmlns:r="http://schemas.openxmlformats.org/officeDocument/2006/relationships" xmlns:p="http://schemas.openxmlformats.org/presentationml/2006/main">
   <p:cSld>
+    <p:bg>
+      <p:bgPr>
+        <a:solidFill>
+          <a:srgbClr val="F9F9FB"/>
+        </a:solidFill>
+        <a:effectLst/>
+      </p:bgPr>
+    </p:bg>
     <p:spTree>
       <p:nvGrpSpPr>
         <p:cNvPr id="1" name=""/>
         <p:cNvGrpSpPr/>
         <p:nvPr/>
       </p:nvGrpSpPr>
-      <p:grpSpPr/>
-      <p:sp>
-        <p:nvSpPr>
-          <p:cNvPr id="2" name="TextBox 1"/>
+      <p:grpSpPr>
+        <a:xfrm>
+          <a:off x="0" y="0"/>
+          <a:ext cx="0" cy="0"/>
+          <a:chOff x="0" y="0"/>
+          <a:chExt cx="0" cy="0"/>
+        </a:xfrm>
+      </p:grpSpPr>
+      <p:sp>
+        <p:nvSpPr>
+          <p:cNvPr id="2" name="Rounded Rectangle 1"/>
+          <p:cNvSpPr/>
+          <p:nvPr/>
+        </p:nvSpPr>
+        <p:spPr>
+          <a:xfrm>
+            <a:off x="658368" y="438912"/>
+            <a:ext cx="2514600" cy="310896"/>
+          </a:xfrm>
+          <a:prstGeom prst="roundRect">
+            <a:avLst/>
+          </a:prstGeom>
+          <a:solidFill>
+            <a:srgbClr val="E7E7EE"/>
+          </a:solidFill>
+          <a:ln>
+            <a:noFill/>
+          </a:ln>
+        </p:spPr>
+        <p:style>
+          <a:lnRef idx="1">
+            <a:schemeClr val="accent1"/>
+          </a:lnRef>
+          <a:fillRef idx="3">
+            <a:schemeClr val="accent1"/>
+          </a:fillRef>
+          <a:effectRef idx="2">
+            <a:schemeClr val="accent1"/>
+          </a:effectRef>
+          <a:fontRef idx="minor">
+            <a:schemeClr val="lt1"/>
+          </a:fontRef>
+        </p:style>
+        <p:txBody>
+          <a:bodyPr rtlCol="0" anchor="ctr"/>
+          <a:lstStyle/>
+          <a:p>
+            <a:pPr algn="ctr"/>
+            <a:endParaRPr/>
+          </a:p>
+        </p:txBody>
+      </p:sp>
+      <p:sp>
+        <p:nvSpPr>
+          <p:cNvPr id="3" name="TextBox 2"/>
           <p:cNvSpPr txBox="1"/>
           <p:nvPr/>
         </p:nvSpPr>
         <p:spPr>
           <a:xfrm>
-            <a:off x="731520" y="548640"/>
-            <a:ext cx="10698480" cy="1097280"/>
+            <a:off x="768096" y="507492"/>
+            <a:ext cx="2240280" cy="146304"/>
           </a:xfrm>
           <a:prstGeom prst="rect">
             <a:avLst/>
@@ -3106,46 +3161,34 @@
           <a:noFill/>
         </p:spPr>
         <p:txBody>
-          <a:bodyPr wrap="square">
+          <a:bodyPr wrap="square" lIns="0" tIns="0" rIns="0" bIns="0" anchor="t">
             <a:spAutoFit/>
           </a:bodyPr>
           <a:lstStyle/>
           <a:p>
-            <a:pPr>
-              <a:defRPr sz="2800" b="1">
-                <a:solidFill>
-                  <a:srgbClr val="1A365D"/>
-                </a:solidFill>
-              </a:defRPr>
-            </a:pPr>
-            <a:r>
-              <a:t>Clínica-Tech | Back-end e Regras de Negócio</a:t>
-            </a:r>
-          </a:p>
-          <a:p>
-            <a:pPr>
-              <a:defRPr sz="1600">
-                <a:solidFill>
-                  <a:srgbClr val="0D9488"/>
-                </a:solidFill>
-              </a:defRPr>
-            </a:pPr>
-            <a:r>
-              <a:t>O que acontece por trás de cada agendamento centralizado</a:t>
-            </a:r>
-          </a:p>
-        </p:txBody>
-      </p:sp>
-      <p:sp>
-        <p:nvSpPr>
-          <p:cNvPr id="3" name="TextBox 2"/>
+            <a:pPr algn="l"/>
+            <a:r>
+              <a:rPr sz="1000" b="0" i="0">
+                <a:solidFill>
+                  <a:srgbClr val="565862"/>
+                </a:solidFill>
+                <a:latin typeface="Arial"/>
+              </a:rPr>
+              <a:t>BACK-END E REGRAS DE NEGÓCIO</a:t>
+            </a:r>
+          </a:p>
+        </p:txBody>
+      </p:sp>
+      <p:sp>
+        <p:nvSpPr>
+          <p:cNvPr id="4" name="TextBox 3"/>
           <p:cNvSpPr txBox="1"/>
           <p:nvPr/>
         </p:nvSpPr>
         <p:spPr>
           <a:xfrm>
-            <a:off x="731520" y="1645920"/>
-            <a:ext cx="10698480" cy="1371600"/>
+            <a:off x="667512" y="960120"/>
+            <a:ext cx="10789920" cy="502920"/>
           </a:xfrm>
           <a:prstGeom prst="rect">
             <a:avLst/>
@@ -3153,46 +3196,34 @@
           <a:noFill/>
         </p:spPr>
         <p:txBody>
-          <a:bodyPr wrap="square">
+          <a:bodyPr wrap="square" lIns="0" tIns="0" rIns="0" bIns="0" anchor="t">
             <a:spAutoFit/>
           </a:bodyPr>
           <a:lstStyle/>
           <a:p>
-            <a:pPr>
-              <a:defRPr sz="1800" b="1">
-                <a:solidFill>
-                  <a:srgbClr val="1E293B"/>
-                </a:solidFill>
-              </a:defRPr>
-            </a:pPr>
-            <a:r>
-              <a:t>Fluxo de Execução da Solicitação:</a:t>
-            </a:r>
-          </a:p>
-          <a:p>
-            <a:pPr>
-              <a:defRPr sz="1500" b="1">
-                <a:solidFill>
-                  <a:srgbClr val="0D9488"/>
-                </a:solidFill>
-              </a:defRPr>
-            </a:pPr>
-            <a:r>
-              <a:t>Canal (WhatsApp/Web)  ➔  Back-end API  ➔  Validação de Regras  ➔  Banco Centralizado  ➔  Resposta Confiável</a:t>
-            </a:r>
-          </a:p>
-        </p:txBody>
-      </p:sp>
-      <p:sp>
-        <p:nvSpPr>
-          <p:cNvPr id="4" name="TextBox 3"/>
+            <a:pPr algn="l"/>
+            <a:r>
+              <a:rPr sz="2700" b="0" i="0">
+                <a:solidFill>
+                  <a:srgbClr val="272934"/>
+                </a:solidFill>
+                <a:latin typeface="Arial"/>
+              </a:rPr>
+              <a:t>Clínica-Tech | Back-end e Regras de Negócio</a:t>
+            </a:r>
+          </a:p>
+        </p:txBody>
+      </p:sp>
+      <p:sp>
+        <p:nvSpPr>
+          <p:cNvPr id="5" name="TextBox 4"/>
           <p:cNvSpPr txBox="1"/>
           <p:nvPr/>
         </p:nvSpPr>
         <p:spPr>
           <a:xfrm>
-            <a:off x="731520" y="3108960"/>
-            <a:ext cx="10698480" cy="3108960"/>
+            <a:off x="685800" y="1572768"/>
+            <a:ext cx="10607040" cy="292608"/>
           </a:xfrm>
           <a:prstGeom prst="rect">
             <a:avLst/>
@@ -3200,89 +3231,1699 @@
           <a:noFill/>
         </p:spPr>
         <p:txBody>
-          <a:bodyPr wrap="square">
+          <a:bodyPr wrap="square" lIns="0" tIns="0" rIns="0" bIns="0" anchor="t">
             <a:spAutoFit/>
           </a:bodyPr>
           <a:lstStyle/>
           <a:p>
-            <a:pPr>
-              <a:defRPr sz="1800" b="1">
-                <a:solidFill>
-                  <a:srgbClr val="1E293B"/>
-                </a:solidFill>
-              </a:defRPr>
-            </a:pPr>
-            <a:r>
+            <a:pPr algn="l"/>
+            <a:r>
+              <a:rPr sz="1350" b="0" i="0">
+                <a:solidFill>
+                  <a:srgbClr val="565862"/>
+                </a:solidFill>
+                <a:latin typeface="Arial"/>
+              </a:rPr>
+              <a:t>O que acontece por trás de cada agendamento centralizado</a:t>
+            </a:r>
+          </a:p>
+        </p:txBody>
+      </p:sp>
+      <p:sp>
+        <p:nvSpPr>
+          <p:cNvPr id="6" name="TextBox 5"/>
+          <p:cNvSpPr txBox="1"/>
+          <p:nvPr/>
+        </p:nvSpPr>
+        <p:spPr>
+          <a:xfrm>
+            <a:off x="704088" y="2084831"/>
+            <a:ext cx="4572000" cy="256032"/>
+          </a:xfrm>
+          <a:prstGeom prst="rect">
+            <a:avLst/>
+          </a:prstGeom>
+          <a:noFill/>
+        </p:spPr>
+        <p:txBody>
+          <a:bodyPr wrap="square" lIns="0" tIns="0" rIns="0" bIns="0" anchor="t">
+            <a:spAutoFit/>
+          </a:bodyPr>
+          <a:lstStyle/>
+          <a:p>
+            <a:pPr algn="l"/>
+            <a:r>
+              <a:rPr sz="1550" b="1" i="0">
+                <a:solidFill>
+                  <a:srgbClr val="272934"/>
+                </a:solidFill>
+                <a:latin typeface="Arial"/>
+              </a:rPr>
+              <a:t>Fluxo de Execução da Solicitação:</a:t>
+            </a:r>
+          </a:p>
+        </p:txBody>
+      </p:sp>
+      <p:sp>
+        <p:nvSpPr>
+          <p:cNvPr id="7" name="Rounded Rectangle 6"/>
+          <p:cNvSpPr/>
+          <p:nvPr/>
+        </p:nvSpPr>
+        <p:spPr>
+          <a:xfrm>
+            <a:off x="704088" y="2487168"/>
+            <a:ext cx="1901952" cy="749808"/>
+          </a:xfrm>
+          <a:prstGeom prst="roundRect">
+            <a:avLst/>
+          </a:prstGeom>
+          <a:solidFill>
+            <a:srgbClr val="FFFFFF"/>
+          </a:solidFill>
+          <a:ln w="12700">
+            <a:solidFill>
+              <a:srgbClr val="CACBD4"/>
+            </a:solidFill>
+          </a:ln>
+        </p:spPr>
+        <p:style>
+          <a:lnRef idx="1">
+            <a:schemeClr val="accent1"/>
+          </a:lnRef>
+          <a:fillRef idx="3">
+            <a:schemeClr val="accent1"/>
+          </a:fillRef>
+          <a:effectRef idx="2">
+            <a:schemeClr val="accent1"/>
+          </a:effectRef>
+          <a:fontRef idx="minor">
+            <a:schemeClr val="lt1"/>
+          </a:fontRef>
+        </p:style>
+        <p:txBody>
+          <a:bodyPr rtlCol="0" anchor="ctr"/>
+          <a:lstStyle/>
+          <a:p>
+            <a:pPr algn="ctr"/>
+            <a:endParaRPr/>
+          </a:p>
+        </p:txBody>
+      </p:sp>
+      <p:sp>
+        <p:nvSpPr>
+          <p:cNvPr id="8" name="Oval 7"/>
+          <p:cNvSpPr/>
+          <p:nvPr/>
+        </p:nvSpPr>
+        <p:spPr>
+          <a:xfrm>
+            <a:off x="822960" y="2688336"/>
+            <a:ext cx="329184" cy="329184"/>
+          </a:xfrm>
+          <a:prstGeom prst="ellipse">
+            <a:avLst/>
+          </a:prstGeom>
+          <a:solidFill>
+            <a:srgbClr val="E7E7EE"/>
+          </a:solidFill>
+          <a:ln>
+            <a:noFill/>
+          </a:ln>
+        </p:spPr>
+        <p:style>
+          <a:lnRef idx="1">
+            <a:schemeClr val="accent1"/>
+          </a:lnRef>
+          <a:fillRef idx="3">
+            <a:schemeClr val="accent1"/>
+          </a:fillRef>
+          <a:effectRef idx="2">
+            <a:schemeClr val="accent1"/>
+          </a:effectRef>
+          <a:fontRef idx="minor">
+            <a:schemeClr val="lt1"/>
+          </a:fontRef>
+        </p:style>
+        <p:txBody>
+          <a:bodyPr rtlCol="0" anchor="ctr"/>
+          <a:lstStyle/>
+          <a:p>
+            <a:pPr algn="ctr"/>
+            <a:endParaRPr/>
+          </a:p>
+        </p:txBody>
+      </p:sp>
+      <p:sp>
+        <p:nvSpPr>
+          <p:cNvPr id="9" name="TextBox 8"/>
+          <p:cNvSpPr txBox="1"/>
+          <p:nvPr/>
+        </p:nvSpPr>
+        <p:spPr>
+          <a:xfrm>
+            <a:off x="822960" y="2770632"/>
+            <a:ext cx="329184" cy="109728"/>
+          </a:xfrm>
+          <a:prstGeom prst="rect">
+            <a:avLst/>
+          </a:prstGeom>
+          <a:noFill/>
+        </p:spPr>
+        <p:txBody>
+          <a:bodyPr wrap="square" lIns="0" tIns="0" rIns="0" bIns="0" anchor="t">
+            <a:spAutoFit/>
+          </a:bodyPr>
+          <a:lstStyle/>
+          <a:p>
+            <a:pPr algn="ctr"/>
+            <a:r>
+              <a:rPr sz="950" b="1" i="0">
+                <a:solidFill>
+                  <a:srgbClr val="565862"/>
+                </a:solidFill>
+                <a:latin typeface="Arial"/>
+              </a:rPr>
+              <a:t>1</a:t>
+            </a:r>
+          </a:p>
+        </p:txBody>
+      </p:sp>
+      <p:sp>
+        <p:nvSpPr>
+          <p:cNvPr id="10" name="TextBox 9"/>
+          <p:cNvSpPr txBox="1"/>
+          <p:nvPr/>
+        </p:nvSpPr>
+        <p:spPr>
+          <a:xfrm>
+            <a:off x="1252728" y="2688336"/>
+            <a:ext cx="1243584" cy="329184"/>
+          </a:xfrm>
+          <a:prstGeom prst="rect">
+            <a:avLst/>
+          </a:prstGeom>
+          <a:noFill/>
+        </p:spPr>
+        <p:txBody>
+          <a:bodyPr wrap="square" lIns="0" tIns="0" rIns="0" bIns="0" anchor="ctr">
+            <a:spAutoFit/>
+          </a:bodyPr>
+          <a:lstStyle/>
+          <a:p>
+            <a:pPr algn="l"/>
+            <a:r>
+              <a:rPr sz="1050" b="1" i="0">
+                <a:solidFill>
+                  <a:srgbClr val="272934"/>
+                </a:solidFill>
+                <a:latin typeface="Arial"/>
+              </a:rPr>
+              <a:t>Canal (WhatsApp/Web)</a:t>
+            </a:r>
+          </a:p>
+        </p:txBody>
+      </p:sp>
+      <p:sp>
+        <p:nvSpPr>
+          <p:cNvPr id="11" name="TextBox 10"/>
+          <p:cNvSpPr txBox="1"/>
+          <p:nvPr/>
+        </p:nvSpPr>
+        <p:spPr>
+          <a:xfrm>
+            <a:off x="2642616" y="2715768"/>
+            <a:ext cx="256032" cy="182880"/>
+          </a:xfrm>
+          <a:prstGeom prst="rect">
+            <a:avLst/>
+          </a:prstGeom>
+          <a:noFill/>
+        </p:spPr>
+        <p:txBody>
+          <a:bodyPr wrap="square" lIns="0" tIns="0" rIns="0" bIns="0" anchor="t">
+            <a:spAutoFit/>
+          </a:bodyPr>
+          <a:lstStyle/>
+          <a:p>
+            <a:pPr algn="ctr"/>
+            <a:r>
+              <a:rPr sz="1400" b="0" i="0">
+                <a:solidFill>
+                  <a:srgbClr val="565862"/>
+                </a:solidFill>
+                <a:latin typeface="Arial"/>
+              </a:rPr>
+              <a:t>➔</a:t>
+            </a:r>
+          </a:p>
+        </p:txBody>
+      </p:sp>
+      <p:sp>
+        <p:nvSpPr>
+          <p:cNvPr id="12" name="Rounded Rectangle 11"/>
+          <p:cNvSpPr/>
+          <p:nvPr/>
+        </p:nvSpPr>
+        <p:spPr>
+          <a:xfrm>
+            <a:off x="2962656" y="2487168"/>
+            <a:ext cx="1700784" cy="749808"/>
+          </a:xfrm>
+          <a:prstGeom prst="roundRect">
+            <a:avLst/>
+          </a:prstGeom>
+          <a:solidFill>
+            <a:srgbClr val="FFFFFF"/>
+          </a:solidFill>
+          <a:ln w="12700">
+            <a:solidFill>
+              <a:srgbClr val="CACBD4"/>
+            </a:solidFill>
+          </a:ln>
+        </p:spPr>
+        <p:style>
+          <a:lnRef idx="1">
+            <a:schemeClr val="accent1"/>
+          </a:lnRef>
+          <a:fillRef idx="3">
+            <a:schemeClr val="accent1"/>
+          </a:fillRef>
+          <a:effectRef idx="2">
+            <a:schemeClr val="accent1"/>
+          </a:effectRef>
+          <a:fontRef idx="minor">
+            <a:schemeClr val="lt1"/>
+          </a:fontRef>
+        </p:style>
+        <p:txBody>
+          <a:bodyPr rtlCol="0" anchor="ctr"/>
+          <a:lstStyle/>
+          <a:p>
+            <a:pPr algn="ctr"/>
+            <a:endParaRPr/>
+          </a:p>
+        </p:txBody>
+      </p:sp>
+      <p:sp>
+        <p:nvSpPr>
+          <p:cNvPr id="13" name="Oval 12"/>
+          <p:cNvSpPr/>
+          <p:nvPr/>
+        </p:nvSpPr>
+        <p:spPr>
+          <a:xfrm>
+            <a:off x="3081528" y="2688336"/>
+            <a:ext cx="329184" cy="329184"/>
+          </a:xfrm>
+          <a:prstGeom prst="ellipse">
+            <a:avLst/>
+          </a:prstGeom>
+          <a:solidFill>
+            <a:srgbClr val="E7E7EE"/>
+          </a:solidFill>
+          <a:ln>
+            <a:noFill/>
+          </a:ln>
+        </p:spPr>
+        <p:style>
+          <a:lnRef idx="1">
+            <a:schemeClr val="accent1"/>
+          </a:lnRef>
+          <a:fillRef idx="3">
+            <a:schemeClr val="accent1"/>
+          </a:fillRef>
+          <a:effectRef idx="2">
+            <a:schemeClr val="accent1"/>
+          </a:effectRef>
+          <a:fontRef idx="minor">
+            <a:schemeClr val="lt1"/>
+          </a:fontRef>
+        </p:style>
+        <p:txBody>
+          <a:bodyPr rtlCol="0" anchor="ctr"/>
+          <a:lstStyle/>
+          <a:p>
+            <a:pPr algn="ctr"/>
+            <a:endParaRPr/>
+          </a:p>
+        </p:txBody>
+      </p:sp>
+      <p:sp>
+        <p:nvSpPr>
+          <p:cNvPr id="14" name="TextBox 13"/>
+          <p:cNvSpPr txBox="1"/>
+          <p:nvPr/>
+        </p:nvSpPr>
+        <p:spPr>
+          <a:xfrm>
+            <a:off x="3081528" y="2770632"/>
+            <a:ext cx="329184" cy="109728"/>
+          </a:xfrm>
+          <a:prstGeom prst="rect">
+            <a:avLst/>
+          </a:prstGeom>
+          <a:noFill/>
+        </p:spPr>
+        <p:txBody>
+          <a:bodyPr wrap="square" lIns="0" tIns="0" rIns="0" bIns="0" anchor="t">
+            <a:spAutoFit/>
+          </a:bodyPr>
+          <a:lstStyle/>
+          <a:p>
+            <a:pPr algn="ctr"/>
+            <a:r>
+              <a:rPr sz="950" b="1" i="0">
+                <a:solidFill>
+                  <a:srgbClr val="565862"/>
+                </a:solidFill>
+                <a:latin typeface="Arial"/>
+              </a:rPr>
+              <a:t>2</a:t>
+            </a:r>
+          </a:p>
+        </p:txBody>
+      </p:sp>
+      <p:sp>
+        <p:nvSpPr>
+          <p:cNvPr id="15" name="TextBox 14"/>
+          <p:cNvSpPr txBox="1"/>
+          <p:nvPr/>
+        </p:nvSpPr>
+        <p:spPr>
+          <a:xfrm>
+            <a:off x="3511296" y="2688336"/>
+            <a:ext cx="1042416" cy="329184"/>
+          </a:xfrm>
+          <a:prstGeom prst="rect">
+            <a:avLst/>
+          </a:prstGeom>
+          <a:noFill/>
+        </p:spPr>
+        <p:txBody>
+          <a:bodyPr wrap="square" lIns="0" tIns="0" rIns="0" bIns="0" anchor="ctr">
+            <a:spAutoFit/>
+          </a:bodyPr>
+          <a:lstStyle/>
+          <a:p>
+            <a:pPr algn="l"/>
+            <a:r>
+              <a:rPr sz="1050" b="1" i="0">
+                <a:solidFill>
+                  <a:srgbClr val="272934"/>
+                </a:solidFill>
+                <a:latin typeface="Arial"/>
+              </a:rPr>
+              <a:t>Back-end API</a:t>
+            </a:r>
+          </a:p>
+        </p:txBody>
+      </p:sp>
+      <p:sp>
+        <p:nvSpPr>
+          <p:cNvPr id="16" name="TextBox 15"/>
+          <p:cNvSpPr txBox="1"/>
+          <p:nvPr/>
+        </p:nvSpPr>
+        <p:spPr>
+          <a:xfrm>
+            <a:off x="4700016" y="2715768"/>
+            <a:ext cx="256032" cy="182880"/>
+          </a:xfrm>
+          <a:prstGeom prst="rect">
+            <a:avLst/>
+          </a:prstGeom>
+          <a:noFill/>
+        </p:spPr>
+        <p:txBody>
+          <a:bodyPr wrap="square" lIns="0" tIns="0" rIns="0" bIns="0" anchor="t">
+            <a:spAutoFit/>
+          </a:bodyPr>
+          <a:lstStyle/>
+          <a:p>
+            <a:pPr algn="ctr"/>
+            <a:r>
+              <a:rPr sz="1400" b="0" i="0">
+                <a:solidFill>
+                  <a:srgbClr val="565862"/>
+                </a:solidFill>
+                <a:latin typeface="Arial"/>
+              </a:rPr>
+              <a:t>➔</a:t>
+            </a:r>
+          </a:p>
+        </p:txBody>
+      </p:sp>
+      <p:sp>
+        <p:nvSpPr>
+          <p:cNvPr id="17" name="Rounded Rectangle 16"/>
+          <p:cNvSpPr/>
+          <p:nvPr/>
+        </p:nvSpPr>
+        <p:spPr>
+          <a:xfrm>
+            <a:off x="5138928" y="2487168"/>
+            <a:ext cx="1901952" cy="749808"/>
+          </a:xfrm>
+          <a:prstGeom prst="roundRect">
+            <a:avLst/>
+          </a:prstGeom>
+          <a:solidFill>
+            <a:srgbClr val="FFFFFF"/>
+          </a:solidFill>
+          <a:ln w="12700">
+            <a:solidFill>
+              <a:srgbClr val="CACBD4"/>
+            </a:solidFill>
+          </a:ln>
+        </p:spPr>
+        <p:style>
+          <a:lnRef idx="1">
+            <a:schemeClr val="accent1"/>
+          </a:lnRef>
+          <a:fillRef idx="3">
+            <a:schemeClr val="accent1"/>
+          </a:fillRef>
+          <a:effectRef idx="2">
+            <a:schemeClr val="accent1"/>
+          </a:effectRef>
+          <a:fontRef idx="minor">
+            <a:schemeClr val="lt1"/>
+          </a:fontRef>
+        </p:style>
+        <p:txBody>
+          <a:bodyPr rtlCol="0" anchor="ctr"/>
+          <a:lstStyle/>
+          <a:p>
+            <a:pPr algn="ctr"/>
+            <a:endParaRPr/>
+          </a:p>
+        </p:txBody>
+      </p:sp>
+      <p:sp>
+        <p:nvSpPr>
+          <p:cNvPr id="18" name="Oval 17"/>
+          <p:cNvSpPr/>
+          <p:nvPr/>
+        </p:nvSpPr>
+        <p:spPr>
+          <a:xfrm>
+            <a:off x="5257800" y="2688336"/>
+            <a:ext cx="329184" cy="329184"/>
+          </a:xfrm>
+          <a:prstGeom prst="ellipse">
+            <a:avLst/>
+          </a:prstGeom>
+          <a:solidFill>
+            <a:srgbClr val="E7E7EE"/>
+          </a:solidFill>
+          <a:ln>
+            <a:noFill/>
+          </a:ln>
+        </p:spPr>
+        <p:style>
+          <a:lnRef idx="1">
+            <a:schemeClr val="accent1"/>
+          </a:lnRef>
+          <a:fillRef idx="3">
+            <a:schemeClr val="accent1"/>
+          </a:fillRef>
+          <a:effectRef idx="2">
+            <a:schemeClr val="accent1"/>
+          </a:effectRef>
+          <a:fontRef idx="minor">
+            <a:schemeClr val="lt1"/>
+          </a:fontRef>
+        </p:style>
+        <p:txBody>
+          <a:bodyPr rtlCol="0" anchor="ctr"/>
+          <a:lstStyle/>
+          <a:p>
+            <a:pPr algn="ctr"/>
+            <a:endParaRPr/>
+          </a:p>
+        </p:txBody>
+      </p:sp>
+      <p:sp>
+        <p:nvSpPr>
+          <p:cNvPr id="19" name="TextBox 18"/>
+          <p:cNvSpPr txBox="1"/>
+          <p:nvPr/>
+        </p:nvSpPr>
+        <p:spPr>
+          <a:xfrm>
+            <a:off x="5257800" y="2770632"/>
+            <a:ext cx="329184" cy="109728"/>
+          </a:xfrm>
+          <a:prstGeom prst="rect">
+            <a:avLst/>
+          </a:prstGeom>
+          <a:noFill/>
+        </p:spPr>
+        <p:txBody>
+          <a:bodyPr wrap="square" lIns="0" tIns="0" rIns="0" bIns="0" anchor="t">
+            <a:spAutoFit/>
+          </a:bodyPr>
+          <a:lstStyle/>
+          <a:p>
+            <a:pPr algn="ctr"/>
+            <a:r>
+              <a:rPr sz="950" b="1" i="0">
+                <a:solidFill>
+                  <a:srgbClr val="565862"/>
+                </a:solidFill>
+                <a:latin typeface="Arial"/>
+              </a:rPr>
+              <a:t>3</a:t>
+            </a:r>
+          </a:p>
+        </p:txBody>
+      </p:sp>
+      <p:sp>
+        <p:nvSpPr>
+          <p:cNvPr id="20" name="TextBox 19"/>
+          <p:cNvSpPr txBox="1"/>
+          <p:nvPr/>
+        </p:nvSpPr>
+        <p:spPr>
+          <a:xfrm>
+            <a:off x="5687568" y="2688336"/>
+            <a:ext cx="1243584" cy="329184"/>
+          </a:xfrm>
+          <a:prstGeom prst="rect">
+            <a:avLst/>
+          </a:prstGeom>
+          <a:noFill/>
+        </p:spPr>
+        <p:txBody>
+          <a:bodyPr wrap="square" lIns="0" tIns="0" rIns="0" bIns="0" anchor="ctr">
+            <a:spAutoFit/>
+          </a:bodyPr>
+          <a:lstStyle/>
+          <a:p>
+            <a:pPr algn="l"/>
+            <a:r>
+              <a:rPr sz="1050" b="1" i="0">
+                <a:solidFill>
+                  <a:srgbClr val="272934"/>
+                </a:solidFill>
+                <a:latin typeface="Arial"/>
+              </a:rPr>
+              <a:t>Validação de Regras</a:t>
+            </a:r>
+          </a:p>
+        </p:txBody>
+      </p:sp>
+      <p:sp>
+        <p:nvSpPr>
+          <p:cNvPr id="21" name="TextBox 20"/>
+          <p:cNvSpPr txBox="1"/>
+          <p:nvPr/>
+        </p:nvSpPr>
+        <p:spPr>
+          <a:xfrm>
+            <a:off x="7077456" y="2715768"/>
+            <a:ext cx="256032" cy="182880"/>
+          </a:xfrm>
+          <a:prstGeom prst="rect">
+            <a:avLst/>
+          </a:prstGeom>
+          <a:noFill/>
+        </p:spPr>
+        <p:txBody>
+          <a:bodyPr wrap="square" lIns="0" tIns="0" rIns="0" bIns="0" anchor="t">
+            <a:spAutoFit/>
+          </a:bodyPr>
+          <a:lstStyle/>
+          <a:p>
+            <a:pPr algn="ctr"/>
+            <a:r>
+              <a:rPr sz="1400" b="0" i="0">
+                <a:solidFill>
+                  <a:srgbClr val="565862"/>
+                </a:solidFill>
+                <a:latin typeface="Arial"/>
+              </a:rPr>
+              <a:t>➔</a:t>
+            </a:r>
+          </a:p>
+        </p:txBody>
+      </p:sp>
+      <p:sp>
+        <p:nvSpPr>
+          <p:cNvPr id="22" name="Rounded Rectangle 21"/>
+          <p:cNvSpPr/>
+          <p:nvPr/>
+        </p:nvSpPr>
+        <p:spPr>
+          <a:xfrm>
+            <a:off x="7406640" y="2487168"/>
+            <a:ext cx="1828800" cy="749808"/>
+          </a:xfrm>
+          <a:prstGeom prst="roundRect">
+            <a:avLst/>
+          </a:prstGeom>
+          <a:solidFill>
+            <a:srgbClr val="FFFFFF"/>
+          </a:solidFill>
+          <a:ln w="12700">
+            <a:solidFill>
+              <a:srgbClr val="CACBD4"/>
+            </a:solidFill>
+          </a:ln>
+        </p:spPr>
+        <p:style>
+          <a:lnRef idx="1">
+            <a:schemeClr val="accent1"/>
+          </a:lnRef>
+          <a:fillRef idx="3">
+            <a:schemeClr val="accent1"/>
+          </a:fillRef>
+          <a:effectRef idx="2">
+            <a:schemeClr val="accent1"/>
+          </a:effectRef>
+          <a:fontRef idx="minor">
+            <a:schemeClr val="lt1"/>
+          </a:fontRef>
+        </p:style>
+        <p:txBody>
+          <a:bodyPr rtlCol="0" anchor="ctr"/>
+          <a:lstStyle/>
+          <a:p>
+            <a:pPr algn="ctr"/>
+            <a:endParaRPr/>
+          </a:p>
+        </p:txBody>
+      </p:sp>
+      <p:sp>
+        <p:nvSpPr>
+          <p:cNvPr id="23" name="Oval 22"/>
+          <p:cNvSpPr/>
+          <p:nvPr/>
+        </p:nvSpPr>
+        <p:spPr>
+          <a:xfrm>
+            <a:off x="7525512" y="2688336"/>
+            <a:ext cx="329184" cy="329184"/>
+          </a:xfrm>
+          <a:prstGeom prst="ellipse">
+            <a:avLst/>
+          </a:prstGeom>
+          <a:solidFill>
+            <a:srgbClr val="E7E7EE"/>
+          </a:solidFill>
+          <a:ln>
+            <a:noFill/>
+          </a:ln>
+        </p:spPr>
+        <p:style>
+          <a:lnRef idx="1">
+            <a:schemeClr val="accent1"/>
+          </a:lnRef>
+          <a:fillRef idx="3">
+            <a:schemeClr val="accent1"/>
+          </a:fillRef>
+          <a:effectRef idx="2">
+            <a:schemeClr val="accent1"/>
+          </a:effectRef>
+          <a:fontRef idx="minor">
+            <a:schemeClr val="lt1"/>
+          </a:fontRef>
+        </p:style>
+        <p:txBody>
+          <a:bodyPr rtlCol="0" anchor="ctr"/>
+          <a:lstStyle/>
+          <a:p>
+            <a:pPr algn="ctr"/>
+            <a:endParaRPr/>
+          </a:p>
+        </p:txBody>
+      </p:sp>
+      <p:sp>
+        <p:nvSpPr>
+          <p:cNvPr id="24" name="TextBox 23"/>
+          <p:cNvSpPr txBox="1"/>
+          <p:nvPr/>
+        </p:nvSpPr>
+        <p:spPr>
+          <a:xfrm>
+            <a:off x="7525512" y="2770632"/>
+            <a:ext cx="329184" cy="109728"/>
+          </a:xfrm>
+          <a:prstGeom prst="rect">
+            <a:avLst/>
+          </a:prstGeom>
+          <a:noFill/>
+        </p:spPr>
+        <p:txBody>
+          <a:bodyPr wrap="square" lIns="0" tIns="0" rIns="0" bIns="0" anchor="t">
+            <a:spAutoFit/>
+          </a:bodyPr>
+          <a:lstStyle/>
+          <a:p>
+            <a:pPr algn="ctr"/>
+            <a:r>
+              <a:rPr sz="950" b="1" i="0">
+                <a:solidFill>
+                  <a:srgbClr val="565862"/>
+                </a:solidFill>
+                <a:latin typeface="Arial"/>
+              </a:rPr>
+              <a:t>4</a:t>
+            </a:r>
+          </a:p>
+        </p:txBody>
+      </p:sp>
+      <p:sp>
+        <p:nvSpPr>
+          <p:cNvPr id="25" name="TextBox 24"/>
+          <p:cNvSpPr txBox="1"/>
+          <p:nvPr/>
+        </p:nvSpPr>
+        <p:spPr>
+          <a:xfrm>
+            <a:off x="7955280" y="2688336"/>
+            <a:ext cx="1170432" cy="329184"/>
+          </a:xfrm>
+          <a:prstGeom prst="rect">
+            <a:avLst/>
+          </a:prstGeom>
+          <a:noFill/>
+        </p:spPr>
+        <p:txBody>
+          <a:bodyPr wrap="square" lIns="0" tIns="0" rIns="0" bIns="0" anchor="ctr">
+            <a:spAutoFit/>
+          </a:bodyPr>
+          <a:lstStyle/>
+          <a:p>
+            <a:pPr algn="l"/>
+            <a:r>
+              <a:rPr sz="1050" b="1" i="0">
+                <a:solidFill>
+                  <a:srgbClr val="272934"/>
+                </a:solidFill>
+                <a:latin typeface="Arial"/>
+              </a:rPr>
+              <a:t>Banco Centralizado</a:t>
+            </a:r>
+          </a:p>
+        </p:txBody>
+      </p:sp>
+      <p:sp>
+        <p:nvSpPr>
+          <p:cNvPr id="26" name="TextBox 25"/>
+          <p:cNvSpPr txBox="1"/>
+          <p:nvPr/>
+        </p:nvSpPr>
+        <p:spPr>
+          <a:xfrm>
+            <a:off x="9272015" y="2715768"/>
+            <a:ext cx="256032" cy="182880"/>
+          </a:xfrm>
+          <a:prstGeom prst="rect">
+            <a:avLst/>
+          </a:prstGeom>
+          <a:noFill/>
+        </p:spPr>
+        <p:txBody>
+          <a:bodyPr wrap="square" lIns="0" tIns="0" rIns="0" bIns="0" anchor="t">
+            <a:spAutoFit/>
+          </a:bodyPr>
+          <a:lstStyle/>
+          <a:p>
+            <a:pPr algn="ctr"/>
+            <a:r>
+              <a:rPr sz="1400" b="0" i="0">
+                <a:solidFill>
+                  <a:srgbClr val="565862"/>
+                </a:solidFill>
+                <a:latin typeface="Arial"/>
+              </a:rPr>
+              <a:t>➔</a:t>
+            </a:r>
+          </a:p>
+        </p:txBody>
+      </p:sp>
+      <p:sp>
+        <p:nvSpPr>
+          <p:cNvPr id="27" name="Rounded Rectangle 26"/>
+          <p:cNvSpPr/>
+          <p:nvPr/>
+        </p:nvSpPr>
+        <p:spPr>
+          <a:xfrm>
+            <a:off x="9665208" y="2487168"/>
+            <a:ext cx="1810512" cy="749808"/>
+          </a:xfrm>
+          <a:prstGeom prst="roundRect">
+            <a:avLst/>
+          </a:prstGeom>
+          <a:solidFill>
+            <a:srgbClr val="DDF4EE"/>
+          </a:solidFill>
+          <a:ln w="12700">
+            <a:solidFill>
+              <a:srgbClr val="13B597"/>
+            </a:solidFill>
+          </a:ln>
+        </p:spPr>
+        <p:style>
+          <a:lnRef idx="1">
+            <a:schemeClr val="accent1"/>
+          </a:lnRef>
+          <a:fillRef idx="3">
+            <a:schemeClr val="accent1"/>
+          </a:fillRef>
+          <a:effectRef idx="2">
+            <a:schemeClr val="accent1"/>
+          </a:effectRef>
+          <a:fontRef idx="minor">
+            <a:schemeClr val="lt1"/>
+          </a:fontRef>
+        </p:style>
+        <p:txBody>
+          <a:bodyPr rtlCol="0" anchor="ctr"/>
+          <a:lstStyle/>
+          <a:p>
+            <a:pPr algn="ctr"/>
+            <a:endParaRPr/>
+          </a:p>
+        </p:txBody>
+      </p:sp>
+      <p:sp>
+        <p:nvSpPr>
+          <p:cNvPr id="28" name="Oval 27"/>
+          <p:cNvSpPr/>
+          <p:nvPr/>
+        </p:nvSpPr>
+        <p:spPr>
+          <a:xfrm>
+            <a:off x="9784080" y="2688336"/>
+            <a:ext cx="329184" cy="329184"/>
+          </a:xfrm>
+          <a:prstGeom prst="ellipse">
+            <a:avLst/>
+          </a:prstGeom>
+          <a:solidFill>
+            <a:srgbClr val="13B597"/>
+          </a:solidFill>
+          <a:ln>
+            <a:noFill/>
+          </a:ln>
+        </p:spPr>
+        <p:style>
+          <a:lnRef idx="1">
+            <a:schemeClr val="accent1"/>
+          </a:lnRef>
+          <a:fillRef idx="3">
+            <a:schemeClr val="accent1"/>
+          </a:fillRef>
+          <a:effectRef idx="2">
+            <a:schemeClr val="accent1"/>
+          </a:effectRef>
+          <a:fontRef idx="minor">
+            <a:schemeClr val="lt1"/>
+          </a:fontRef>
+        </p:style>
+        <p:txBody>
+          <a:bodyPr rtlCol="0" anchor="ctr"/>
+          <a:lstStyle/>
+          <a:p>
+            <a:pPr algn="ctr"/>
+            <a:endParaRPr/>
+          </a:p>
+        </p:txBody>
+      </p:sp>
+      <p:sp>
+        <p:nvSpPr>
+          <p:cNvPr id="29" name="TextBox 28"/>
+          <p:cNvSpPr txBox="1"/>
+          <p:nvPr/>
+        </p:nvSpPr>
+        <p:spPr>
+          <a:xfrm>
+            <a:off x="9784080" y="2770632"/>
+            <a:ext cx="329184" cy="109728"/>
+          </a:xfrm>
+          <a:prstGeom prst="rect">
+            <a:avLst/>
+          </a:prstGeom>
+          <a:noFill/>
+        </p:spPr>
+        <p:txBody>
+          <a:bodyPr wrap="square" lIns="0" tIns="0" rIns="0" bIns="0" anchor="t">
+            <a:spAutoFit/>
+          </a:bodyPr>
+          <a:lstStyle/>
+          <a:p>
+            <a:pPr algn="ctr"/>
+            <a:r>
+              <a:rPr sz="950" b="1" i="0">
+                <a:solidFill>
+                  <a:srgbClr val="FFFFFF"/>
+                </a:solidFill>
+                <a:latin typeface="Arial"/>
+              </a:rPr>
+              <a:t>5</a:t>
+            </a:r>
+          </a:p>
+        </p:txBody>
+      </p:sp>
+      <p:sp>
+        <p:nvSpPr>
+          <p:cNvPr id="30" name="TextBox 29"/>
+          <p:cNvSpPr txBox="1"/>
+          <p:nvPr/>
+        </p:nvSpPr>
+        <p:spPr>
+          <a:xfrm>
+            <a:off x="10213848" y="2688336"/>
+            <a:ext cx="1152144" cy="329184"/>
+          </a:xfrm>
+          <a:prstGeom prst="rect">
+            <a:avLst/>
+          </a:prstGeom>
+          <a:noFill/>
+        </p:spPr>
+        <p:txBody>
+          <a:bodyPr wrap="square" lIns="0" tIns="0" rIns="0" bIns="0" anchor="ctr">
+            <a:spAutoFit/>
+          </a:bodyPr>
+          <a:lstStyle/>
+          <a:p>
+            <a:pPr algn="l"/>
+            <a:r>
+              <a:rPr sz="1050" b="1" i="0">
+                <a:solidFill>
+                  <a:srgbClr val="272934"/>
+                </a:solidFill>
+                <a:latin typeface="Arial"/>
+              </a:rPr>
+              <a:t>Resposta Confiável</a:t>
+            </a:r>
+          </a:p>
+        </p:txBody>
+      </p:sp>
+      <p:sp>
+        <p:nvSpPr>
+          <p:cNvPr id="31" name="Rounded Rectangle 30"/>
+          <p:cNvSpPr/>
+          <p:nvPr/>
+        </p:nvSpPr>
+        <p:spPr>
+          <a:xfrm>
+            <a:off x="704088" y="3401568"/>
+            <a:ext cx="10789920" cy="502920"/>
+          </a:xfrm>
+          <a:prstGeom prst="roundRect">
+            <a:avLst/>
+          </a:prstGeom>
+          <a:solidFill>
+            <a:srgbClr val="DDF4EE"/>
+          </a:solidFill>
+          <a:ln w="12700">
+            <a:solidFill>
+              <a:srgbClr val="13B597"/>
+            </a:solidFill>
+          </a:ln>
+        </p:spPr>
+        <p:style>
+          <a:lnRef idx="1">
+            <a:schemeClr val="accent1"/>
+          </a:lnRef>
+          <a:fillRef idx="3">
+            <a:schemeClr val="accent1"/>
+          </a:fillRef>
+          <a:effectRef idx="2">
+            <a:schemeClr val="accent1"/>
+          </a:effectRef>
+          <a:fontRef idx="minor">
+            <a:schemeClr val="lt1"/>
+          </a:fontRef>
+        </p:style>
+        <p:txBody>
+          <a:bodyPr rtlCol="0" anchor="ctr"/>
+          <a:lstStyle/>
+          <a:p>
+            <a:pPr algn="ctr"/>
+            <a:endParaRPr/>
+          </a:p>
+        </p:txBody>
+      </p:sp>
+      <p:sp>
+        <p:nvSpPr>
+          <p:cNvPr id="32" name="TextBox 31"/>
+          <p:cNvSpPr txBox="1"/>
+          <p:nvPr/>
+        </p:nvSpPr>
+        <p:spPr>
+          <a:xfrm>
+            <a:off x="932688" y="3566160"/>
+            <a:ext cx="10332720" cy="164592"/>
+          </a:xfrm>
+          <a:prstGeom prst="rect">
+            <a:avLst/>
+          </a:prstGeom>
+          <a:noFill/>
+        </p:spPr>
+        <p:txBody>
+          <a:bodyPr wrap="square" lIns="0" tIns="0" rIns="0" bIns="0" anchor="t">
+            <a:spAutoFit/>
+          </a:bodyPr>
+          <a:lstStyle/>
+          <a:p>
+            <a:pPr algn="ctr"/>
+            <a:r>
+              <a:rPr sz="1060" b="1" i="0">
+                <a:solidFill>
+                  <a:srgbClr val="147E6C"/>
+                </a:solidFill>
+                <a:latin typeface="Arial"/>
+              </a:rPr>
+              <a:t>Canal (WhatsApp/Web)  ➔  Back-end API  ➔  Validação de Regras  ➔  Banco Centralizado  ➔  Resposta Confiável</a:t>
+            </a:r>
+          </a:p>
+        </p:txBody>
+      </p:sp>
+      <p:sp>
+        <p:nvSpPr>
+          <p:cNvPr id="33" name="TextBox 32"/>
+          <p:cNvSpPr txBox="1"/>
+          <p:nvPr/>
+        </p:nvSpPr>
+        <p:spPr>
+          <a:xfrm>
+            <a:off x="704088" y="4160520"/>
+            <a:ext cx="6675120" cy="256032"/>
+          </a:xfrm>
+          <a:prstGeom prst="rect">
+            <a:avLst/>
+          </a:prstGeom>
+          <a:noFill/>
+        </p:spPr>
+        <p:txBody>
+          <a:bodyPr wrap="square" lIns="0" tIns="0" rIns="0" bIns="0" anchor="t">
+            <a:spAutoFit/>
+          </a:bodyPr>
+          <a:lstStyle/>
+          <a:p>
+            <a:pPr algn="l"/>
+            <a:r>
+              <a:rPr sz="1550" b="1" i="0">
+                <a:solidFill>
+                  <a:srgbClr val="272934"/>
+                </a:solidFill>
+                <a:latin typeface="Arial"/>
+              </a:rPr>
               <a:t>Exemplo Prático: Prevenção de Conflito de Horários (RN01 e RNF03)</a:t>
             </a:r>
           </a:p>
-          <a:p>
-            <a:pPr>
-              <a:spcBef>
-                <a:spcPts val="1000"/>
-              </a:spcBef>
-            </a:pPr>
-            <a:r>
-              <a:rPr b="1" sz="1500">
-                <a:solidFill>
-                  <a:srgbClr val="1A365D"/>
-                </a:solidFill>
+        </p:txBody>
+      </p:sp>
+      <p:sp>
+        <p:nvSpPr>
+          <p:cNvPr id="34" name="Rounded Rectangle 33"/>
+          <p:cNvSpPr/>
+          <p:nvPr/>
+        </p:nvSpPr>
+        <p:spPr>
+          <a:xfrm>
+            <a:off x="704088" y="4599432"/>
+            <a:ext cx="3346704" cy="1325880"/>
+          </a:xfrm>
+          <a:prstGeom prst="roundRect">
+            <a:avLst/>
+          </a:prstGeom>
+          <a:solidFill>
+            <a:srgbClr val="F1F1F5"/>
+          </a:solidFill>
+          <a:ln w="12700">
+            <a:solidFill>
+              <a:srgbClr val="CACBD4"/>
+            </a:solidFill>
+          </a:ln>
+        </p:spPr>
+        <p:style>
+          <a:lnRef idx="1">
+            <a:schemeClr val="accent1"/>
+          </a:lnRef>
+          <a:fillRef idx="3">
+            <a:schemeClr val="accent1"/>
+          </a:fillRef>
+          <a:effectRef idx="2">
+            <a:schemeClr val="accent1"/>
+          </a:effectRef>
+          <a:fontRef idx="minor">
+            <a:schemeClr val="lt1"/>
+          </a:fontRef>
+        </p:style>
+        <p:txBody>
+          <a:bodyPr rtlCol="0" anchor="ctr"/>
+          <a:lstStyle/>
+          <a:p>
+            <a:pPr algn="ctr"/>
+            <a:endParaRPr/>
+          </a:p>
+        </p:txBody>
+      </p:sp>
+      <p:sp>
+        <p:nvSpPr>
+          <p:cNvPr id="35" name="Diamond 34"/>
+          <p:cNvSpPr/>
+          <p:nvPr/>
+        </p:nvSpPr>
+        <p:spPr>
+          <a:xfrm>
+            <a:off x="886968" y="4782312"/>
+            <a:ext cx="329184" cy="329184"/>
+          </a:xfrm>
+          <a:prstGeom prst="diamond">
+            <a:avLst/>
+          </a:prstGeom>
+          <a:solidFill>
+            <a:srgbClr val="DDF4EE"/>
+          </a:solidFill>
+          <a:ln>
+            <a:solidFill>
+              <a:srgbClr val="13B597"/>
+            </a:solidFill>
+          </a:ln>
+        </p:spPr>
+        <p:style>
+          <a:lnRef idx="1">
+            <a:schemeClr val="accent1"/>
+          </a:lnRef>
+          <a:fillRef idx="3">
+            <a:schemeClr val="accent1"/>
+          </a:fillRef>
+          <a:effectRef idx="2">
+            <a:schemeClr val="accent1"/>
+          </a:effectRef>
+          <a:fontRef idx="minor">
+            <a:schemeClr val="lt1"/>
+          </a:fontRef>
+        </p:style>
+        <p:txBody>
+          <a:bodyPr rtlCol="0" anchor="ctr"/>
+          <a:lstStyle/>
+          <a:p>
+            <a:pPr algn="ctr"/>
+            <a:endParaRPr/>
+          </a:p>
+        </p:txBody>
+      </p:sp>
+      <p:sp>
+        <p:nvSpPr>
+          <p:cNvPr id="36" name="TextBox 35"/>
+          <p:cNvSpPr txBox="1"/>
+          <p:nvPr/>
+        </p:nvSpPr>
+        <p:spPr>
+          <a:xfrm>
+            <a:off x="1325880" y="4718304"/>
+            <a:ext cx="2468880" cy="310896"/>
+          </a:xfrm>
+          <a:prstGeom prst="rect">
+            <a:avLst/>
+          </a:prstGeom>
+          <a:noFill/>
+        </p:spPr>
+        <p:txBody>
+          <a:bodyPr wrap="square" lIns="0" tIns="0" rIns="0" bIns="0">
+            <a:spAutoFit/>
+          </a:bodyPr>
+          <a:lstStyle/>
+          <a:p>
+            <a:r>
+              <a:rPr sz="1120" b="1">
+                <a:solidFill>
+                  <a:srgbClr val="272934"/>
+                </a:solidFill>
+                <a:latin typeface="Arial"/>
               </a:rPr>
-              <a:t>• Validação de Agenda Única: </a:t>
-            </a:r>
-            <a:r>
-              <a:rPr sz="1500">
-                <a:solidFill>
-                  <a:srgbClr val="1E293B"/>
-                </a:solidFill>
+              <a:t>Validação de Agenda Única:</a:t>
+            </a:r>
+          </a:p>
+        </p:txBody>
+      </p:sp>
+      <p:sp>
+        <p:nvSpPr>
+          <p:cNvPr id="37" name="TextBox 36"/>
+          <p:cNvSpPr txBox="1"/>
+          <p:nvPr/>
+        </p:nvSpPr>
+        <p:spPr>
+          <a:xfrm>
+            <a:off x="1325880" y="5074920"/>
+            <a:ext cx="2487168" cy="658368"/>
+          </a:xfrm>
+          <a:prstGeom prst="rect">
+            <a:avLst/>
+          </a:prstGeom>
+          <a:noFill/>
+        </p:spPr>
+        <p:txBody>
+          <a:bodyPr wrap="square" lIns="0" tIns="0" rIns="0" bIns="0" anchor="t">
+            <a:spAutoFit/>
+          </a:bodyPr>
+          <a:lstStyle/>
+          <a:p>
+            <a:pPr algn="l"/>
+            <a:r>
+              <a:rPr sz="960" b="0" i="0">
+                <a:solidFill>
+                  <a:srgbClr val="565862"/>
+                </a:solidFill>
+                <a:latin typeface="Arial"/>
               </a:rPr>
               <a:t>Chatbot e secretária consultam exatamente a mesma base de dados em tempo real.</a:t>
             </a:r>
           </a:p>
-          <a:p>
-            <a:pPr>
-              <a:spcBef>
-                <a:spcPts val="1000"/>
-              </a:spcBef>
-            </a:pPr>
-            <a:r>
-              <a:rPr b="1" sz="1500">
-                <a:solidFill>
-                  <a:srgbClr val="1A365D"/>
-                </a:solidFill>
+        </p:txBody>
+      </p:sp>
+      <p:sp>
+        <p:nvSpPr>
+          <p:cNvPr id="38" name="Rounded Rectangle 37"/>
+          <p:cNvSpPr/>
+          <p:nvPr/>
+        </p:nvSpPr>
+        <p:spPr>
+          <a:xfrm>
+            <a:off x="4379975" y="4599432"/>
+            <a:ext cx="3346704" cy="1325880"/>
+          </a:xfrm>
+          <a:prstGeom prst="roundRect">
+            <a:avLst/>
+          </a:prstGeom>
+          <a:solidFill>
+            <a:srgbClr val="F1F1F5"/>
+          </a:solidFill>
+          <a:ln w="12700">
+            <a:solidFill>
+              <a:srgbClr val="CACBD4"/>
+            </a:solidFill>
+          </a:ln>
+        </p:spPr>
+        <p:style>
+          <a:lnRef idx="1">
+            <a:schemeClr val="accent1"/>
+          </a:lnRef>
+          <a:fillRef idx="3">
+            <a:schemeClr val="accent1"/>
+          </a:fillRef>
+          <a:effectRef idx="2">
+            <a:schemeClr val="accent1"/>
+          </a:effectRef>
+          <a:fontRef idx="minor">
+            <a:schemeClr val="lt1"/>
+          </a:fontRef>
+        </p:style>
+        <p:txBody>
+          <a:bodyPr rtlCol="0" anchor="ctr"/>
+          <a:lstStyle/>
+          <a:p>
+            <a:pPr algn="ctr"/>
+            <a:endParaRPr/>
+          </a:p>
+        </p:txBody>
+      </p:sp>
+      <p:sp>
+        <p:nvSpPr>
+          <p:cNvPr id="39" name="Oval 38"/>
+          <p:cNvSpPr/>
+          <p:nvPr/>
+        </p:nvSpPr>
+        <p:spPr>
+          <a:xfrm>
+            <a:off x="4562855" y="4782312"/>
+            <a:ext cx="329184" cy="329184"/>
+          </a:xfrm>
+          <a:prstGeom prst="ellipse">
+            <a:avLst/>
+          </a:prstGeom>
+          <a:solidFill>
+            <a:srgbClr val="DDF4EE"/>
+          </a:solidFill>
+          <a:ln>
+            <a:solidFill>
+              <a:srgbClr val="13B597"/>
+            </a:solidFill>
+          </a:ln>
+        </p:spPr>
+        <p:style>
+          <a:lnRef idx="1">
+            <a:schemeClr val="accent1"/>
+          </a:lnRef>
+          <a:fillRef idx="3">
+            <a:schemeClr val="accent1"/>
+          </a:fillRef>
+          <a:effectRef idx="2">
+            <a:schemeClr val="accent1"/>
+          </a:effectRef>
+          <a:fontRef idx="minor">
+            <a:schemeClr val="lt1"/>
+          </a:fontRef>
+        </p:style>
+        <p:txBody>
+          <a:bodyPr rtlCol="0" anchor="ctr"/>
+          <a:lstStyle/>
+          <a:p>
+            <a:pPr algn="ctr"/>
+            <a:endParaRPr/>
+          </a:p>
+        </p:txBody>
+      </p:sp>
+      <p:sp>
+        <p:nvSpPr>
+          <p:cNvPr id="40" name="TextBox 39"/>
+          <p:cNvSpPr txBox="1"/>
+          <p:nvPr/>
+        </p:nvSpPr>
+        <p:spPr>
+          <a:xfrm>
+            <a:off x="5001767" y="4718304"/>
+            <a:ext cx="2468880" cy="310896"/>
+          </a:xfrm>
+          <a:prstGeom prst="rect">
+            <a:avLst/>
+          </a:prstGeom>
+          <a:noFill/>
+        </p:spPr>
+        <p:txBody>
+          <a:bodyPr wrap="square" lIns="0" tIns="0" rIns="0" bIns="0">
+            <a:spAutoFit/>
+          </a:bodyPr>
+          <a:lstStyle/>
+          <a:p>
+            <a:r>
+              <a:rPr sz="1120" b="1">
+                <a:solidFill>
+                  <a:srgbClr val="272934"/>
+                </a:solidFill>
+                <a:latin typeface="Arial"/>
               </a:rPr>
-              <a:t>• Prevenção de Duplicidade: </a:t>
-            </a:r>
-            <a:r>
-              <a:rPr sz="1500">
-                <a:solidFill>
-                  <a:srgbClr val="1E293B"/>
-                </a:solidFill>
+              <a:t>Prevenção de Duplicidade:</a:t>
+            </a:r>
+          </a:p>
+        </p:txBody>
+      </p:sp>
+      <p:sp>
+        <p:nvSpPr>
+          <p:cNvPr id="41" name="TextBox 40"/>
+          <p:cNvSpPr txBox="1"/>
+          <p:nvPr/>
+        </p:nvSpPr>
+        <p:spPr>
+          <a:xfrm>
+            <a:off x="5001767" y="5074920"/>
+            <a:ext cx="2487168" cy="658368"/>
+          </a:xfrm>
+          <a:prstGeom prst="rect">
+            <a:avLst/>
+          </a:prstGeom>
+          <a:noFill/>
+        </p:spPr>
+        <p:txBody>
+          <a:bodyPr wrap="square" lIns="0" tIns="0" rIns="0" bIns="0" anchor="t">
+            <a:spAutoFit/>
+          </a:bodyPr>
+          <a:lstStyle/>
+          <a:p>
+            <a:pPr algn="l"/>
+            <a:r>
+              <a:rPr sz="960" b="0" i="0">
+                <a:solidFill>
+                  <a:srgbClr val="565862"/>
+                </a:solidFill>
+                <a:latin typeface="Arial"/>
               </a:rPr>
               <a:t>Um profissional não pode ter dois atendimentos no mesmo horário, mesmo que em unidades distintas.</a:t>
             </a:r>
           </a:p>
-          <a:p>
-            <a:pPr>
-              <a:spcBef>
-                <a:spcPts val="1000"/>
-              </a:spcBef>
-            </a:pPr>
-            <a:r>
-              <a:rPr b="1" sz="1500">
-                <a:solidFill>
-                  <a:srgbClr val="1A365D"/>
-                </a:solidFill>
+        </p:txBody>
+      </p:sp>
+      <p:sp>
+        <p:nvSpPr>
+          <p:cNvPr id="42" name="Rounded Rectangle 41"/>
+          <p:cNvSpPr/>
+          <p:nvPr/>
+        </p:nvSpPr>
+        <p:spPr>
+          <a:xfrm>
+            <a:off x="8055863" y="4599432"/>
+            <a:ext cx="3346704" cy="1325880"/>
+          </a:xfrm>
+          <a:prstGeom prst="roundRect">
+            <a:avLst/>
+          </a:prstGeom>
+          <a:solidFill>
+            <a:srgbClr val="F1F1F5"/>
+          </a:solidFill>
+          <a:ln w="12700">
+            <a:solidFill>
+              <a:srgbClr val="CACBD4"/>
+            </a:solidFill>
+          </a:ln>
+        </p:spPr>
+        <p:style>
+          <a:lnRef idx="1">
+            <a:schemeClr val="accent1"/>
+          </a:lnRef>
+          <a:fillRef idx="3">
+            <a:schemeClr val="accent1"/>
+          </a:fillRef>
+          <a:effectRef idx="2">
+            <a:schemeClr val="accent1"/>
+          </a:effectRef>
+          <a:fontRef idx="minor">
+            <a:schemeClr val="lt1"/>
+          </a:fontRef>
+        </p:style>
+        <p:txBody>
+          <a:bodyPr rtlCol="0" anchor="ctr"/>
+          <a:lstStyle/>
+          <a:p>
+            <a:pPr algn="ctr"/>
+            <a:endParaRPr/>
+          </a:p>
+        </p:txBody>
+      </p:sp>
+      <p:sp>
+        <p:nvSpPr>
+          <p:cNvPr id="43" name="Hexagon 42"/>
+          <p:cNvSpPr/>
+          <p:nvPr/>
+        </p:nvSpPr>
+        <p:spPr>
+          <a:xfrm>
+            <a:off x="8238743" y="4782312"/>
+            <a:ext cx="329184" cy="329184"/>
+          </a:xfrm>
+          <a:prstGeom prst="hexagon">
+            <a:avLst/>
+          </a:prstGeom>
+          <a:solidFill>
+            <a:srgbClr val="DDF4EE"/>
+          </a:solidFill>
+          <a:ln>
+            <a:solidFill>
+              <a:srgbClr val="13B597"/>
+            </a:solidFill>
+          </a:ln>
+        </p:spPr>
+        <p:style>
+          <a:lnRef idx="1">
+            <a:schemeClr val="accent1"/>
+          </a:lnRef>
+          <a:fillRef idx="3">
+            <a:schemeClr val="accent1"/>
+          </a:fillRef>
+          <a:effectRef idx="2">
+            <a:schemeClr val="accent1"/>
+          </a:effectRef>
+          <a:fontRef idx="minor">
+            <a:schemeClr val="lt1"/>
+          </a:fontRef>
+        </p:style>
+        <p:txBody>
+          <a:bodyPr rtlCol="0" anchor="ctr"/>
+          <a:lstStyle/>
+          <a:p>
+            <a:pPr algn="ctr"/>
+            <a:endParaRPr/>
+          </a:p>
+        </p:txBody>
+      </p:sp>
+      <p:sp>
+        <p:nvSpPr>
+          <p:cNvPr id="44" name="TextBox 43"/>
+          <p:cNvSpPr txBox="1"/>
+          <p:nvPr/>
+        </p:nvSpPr>
+        <p:spPr>
+          <a:xfrm>
+            <a:off x="8677655" y="4718304"/>
+            <a:ext cx="2468880" cy="310896"/>
+          </a:xfrm>
+          <a:prstGeom prst="rect">
+            <a:avLst/>
+          </a:prstGeom>
+          <a:noFill/>
+        </p:spPr>
+        <p:txBody>
+          <a:bodyPr wrap="square" lIns="0" tIns="0" rIns="0" bIns="0">
+            <a:spAutoFit/>
+          </a:bodyPr>
+          <a:lstStyle/>
+          <a:p>
+            <a:r>
+              <a:rPr sz="1120" b="1">
+                <a:solidFill>
+                  <a:srgbClr val="272934"/>
+                </a:solidFill>
+                <a:latin typeface="Arial"/>
               </a:rPr>
-              <a:t>• Transação Atômica: </a:t>
-            </a:r>
-            <a:r>
-              <a:rPr sz="1500">
-                <a:solidFill>
-                  <a:srgbClr val="1E293B"/>
-                </a:solidFill>
+              <a:t>Transação Atômica:</a:t>
+            </a:r>
+          </a:p>
+        </p:txBody>
+      </p:sp>
+      <p:sp>
+        <p:nvSpPr>
+          <p:cNvPr id="45" name="TextBox 44"/>
+          <p:cNvSpPr txBox="1"/>
+          <p:nvPr/>
+        </p:nvSpPr>
+        <p:spPr>
+          <a:xfrm>
+            <a:off x="8677655" y="5074920"/>
+            <a:ext cx="2487168" cy="658368"/>
+          </a:xfrm>
+          <a:prstGeom prst="rect">
+            <a:avLst/>
+          </a:prstGeom>
+          <a:noFill/>
+        </p:spPr>
+        <p:txBody>
+          <a:bodyPr wrap="square" lIns="0" tIns="0" rIns="0" bIns="0" anchor="t">
+            <a:spAutoFit/>
+          </a:bodyPr>
+          <a:lstStyle/>
+          <a:p>
+            <a:pPr algn="l"/>
+            <a:r>
+              <a:rPr sz="960" b="0" i="0">
+                <a:solidFill>
+                  <a:srgbClr val="565862"/>
+                </a:solidFill>
+                <a:latin typeface="Arial"/>
               </a:rPr>
               <a:t>O horário só é ocupado no momento exato da confirmação final, liberando a vaga imediatamente em caso de cancelamento.</a:t>
+            </a:r>
+          </a:p>
+        </p:txBody>
+      </p:sp>
+      <p:cxnSp>
+        <p:nvCxnSpPr>
+          <p:cNvPr id="46" name="Connector 45"/>
+          <p:cNvCxnSpPr/>
+          <p:nvPr/>
+        </p:nvCxnSpPr>
+        <p:spPr>
+          <a:xfrm>
+            <a:off x="621792" y="6501384"/>
+            <a:ext cx="11146536" cy="0"/>
+          </a:xfrm>
+          <a:prstGeom prst="line">
+            <a:avLst/>
+          </a:prstGeom>
+          <a:ln w="10160">
+            <a:solidFill>
+              <a:srgbClr val="CACBD4"/>
+            </a:solidFill>
+          </a:ln>
+        </p:spPr>
+        <p:style>
+          <a:lnRef idx="2">
+            <a:schemeClr val="accent1"/>
+          </a:lnRef>
+          <a:fillRef idx="0">
+            <a:schemeClr val="accent1"/>
+          </a:fillRef>
+          <a:effectRef idx="1">
+            <a:schemeClr val="accent1"/>
+          </a:effectRef>
+          <a:fontRef idx="minor">
+            <a:schemeClr val="tx1"/>
+          </a:fontRef>
+        </p:style>
+      </p:cxnSp>
+      <p:sp>
+        <p:nvSpPr>
+          <p:cNvPr id="47" name="TextBox 46"/>
+          <p:cNvSpPr txBox="1"/>
+          <p:nvPr/>
+        </p:nvSpPr>
+        <p:spPr>
+          <a:xfrm>
+            <a:off x="630936" y="6547104"/>
+            <a:ext cx="3657600" cy="146304"/>
+          </a:xfrm>
+          <a:prstGeom prst="rect">
+            <a:avLst/>
+          </a:prstGeom>
+          <a:noFill/>
+        </p:spPr>
+        <p:txBody>
+          <a:bodyPr wrap="square" lIns="0" tIns="0" rIns="0" bIns="0" anchor="t">
+            <a:spAutoFit/>
+          </a:bodyPr>
+          <a:lstStyle/>
+          <a:p>
+            <a:pPr algn="l"/>
+            <a:r>
+              <a:rPr sz="900" b="0" i="0">
+                <a:solidFill>
+                  <a:srgbClr val="787984"/>
+                </a:solidFill>
+                <a:latin typeface="Arial"/>
+              </a:rPr>
+              <a:t>Clínica-Tech · Projeto de Perfil Profissional</a:t>
+            </a:r>
+          </a:p>
+        </p:txBody>
+      </p:sp>
+      <p:sp>
+        <p:nvSpPr>
+          <p:cNvPr id="48" name="TextBox 47"/>
+          <p:cNvSpPr txBox="1"/>
+          <p:nvPr/>
+        </p:nvSpPr>
+        <p:spPr>
+          <a:xfrm>
+            <a:off x="11521440" y="6547104"/>
+            <a:ext cx="256032" cy="146304"/>
+          </a:xfrm>
+          <a:prstGeom prst="rect">
+            <a:avLst/>
+          </a:prstGeom>
+          <a:noFill/>
+        </p:spPr>
+        <p:txBody>
+          <a:bodyPr wrap="square" lIns="0" tIns="0" rIns="0" bIns="0" anchor="t">
+            <a:spAutoFit/>
+          </a:bodyPr>
+          <a:lstStyle/>
+          <a:p>
+            <a:pPr algn="r"/>
+            <a:r>
+              <a:rPr sz="900" b="0" i="0">
+                <a:solidFill>
+                  <a:srgbClr val="787984"/>
+                </a:solidFill>
+                <a:latin typeface="Arial"/>
+              </a:rPr>
+              <a:t>15</a:t>
             </a:r>
           </a:p>
         </p:txBody>
@@ -3296,25 +4937,84 @@
 </file>
 
 <file path=ppt/slides/slide2.xml><?xml version="1.0" encoding="utf-8"?>
-<p:sld xmlns:a="http://schemas.openxmlformats.org/drawingml/2006/main" xmlns:p="http://schemas.openxmlformats.org/presentationml/2006/main" xmlns:r="http://schemas.openxmlformats.org/officeDocument/2006/relationships">
+<p:sld xmlns:a="http://schemas.openxmlformats.org/drawingml/2006/main" xmlns:r="http://schemas.openxmlformats.org/officeDocument/2006/relationships" xmlns:p="http://schemas.openxmlformats.org/presentationml/2006/main">
   <p:cSld>
+    <p:bg>
+      <p:bgPr>
+        <a:solidFill>
+          <a:srgbClr val="F9F9FB"/>
+        </a:solidFill>
+        <a:effectLst/>
+      </p:bgPr>
+    </p:bg>
     <p:spTree>
       <p:nvGrpSpPr>
         <p:cNvPr id="1" name=""/>
         <p:cNvGrpSpPr/>
         <p:nvPr/>
       </p:nvGrpSpPr>
-      <p:grpSpPr/>
-      <p:sp>
-        <p:nvSpPr>
-          <p:cNvPr id="2" name="TextBox 1"/>
+      <p:grpSpPr>
+        <a:xfrm>
+          <a:off x="0" y="0"/>
+          <a:ext cx="0" cy="0"/>
+          <a:chOff x="0" y="0"/>
+          <a:chExt cx="0" cy="0"/>
+        </a:xfrm>
+      </p:grpSpPr>
+      <p:sp>
+        <p:nvSpPr>
+          <p:cNvPr id="2" name="Rounded Rectangle 1"/>
+          <p:cNvSpPr/>
+          <p:nvPr/>
+        </p:nvSpPr>
+        <p:spPr>
+          <a:xfrm>
+            <a:off x="658368" y="438912"/>
+            <a:ext cx="2514600" cy="310896"/>
+          </a:xfrm>
+          <a:prstGeom prst="roundRect">
+            <a:avLst/>
+          </a:prstGeom>
+          <a:solidFill>
+            <a:srgbClr val="E7E7EE"/>
+          </a:solidFill>
+          <a:ln>
+            <a:noFill/>
+          </a:ln>
+        </p:spPr>
+        <p:style>
+          <a:lnRef idx="1">
+            <a:schemeClr val="accent1"/>
+          </a:lnRef>
+          <a:fillRef idx="3">
+            <a:schemeClr val="accent1"/>
+          </a:fillRef>
+          <a:effectRef idx="2">
+            <a:schemeClr val="accent1"/>
+          </a:effectRef>
+          <a:fontRef idx="minor">
+            <a:schemeClr val="lt1"/>
+          </a:fontRef>
+        </p:style>
+        <p:txBody>
+          <a:bodyPr rtlCol="0" anchor="ctr"/>
+          <a:lstStyle/>
+          <a:p>
+            <a:pPr algn="ctr"/>
+            <a:endParaRPr/>
+          </a:p>
+        </p:txBody>
+      </p:sp>
+      <p:sp>
+        <p:nvSpPr>
+          <p:cNvPr id="3" name="TextBox 2"/>
           <p:cNvSpPr txBox="1"/>
           <p:nvPr/>
         </p:nvSpPr>
         <p:spPr>
           <a:xfrm>
-            <a:off x="731520" y="548640"/>
-            <a:ext cx="10698480" cy="1097280"/>
+            <a:off x="768096" y="507492"/>
+            <a:ext cx="2240280" cy="146304"/>
           </a:xfrm>
           <a:prstGeom prst="rect">
             <a:avLst/>
@@ -3322,33 +5022,1374 @@
           <a:noFill/>
         </p:spPr>
         <p:txBody>
-          <a:bodyPr wrap="square">
+          <a:bodyPr wrap="square" lIns="0" tIns="0" rIns="0" bIns="0" anchor="t">
             <a:spAutoFit/>
           </a:bodyPr>
           <a:lstStyle/>
           <a:p>
-            <a:pPr>
-              <a:defRPr sz="2800" b="1">
-                <a:solidFill>
-                  <a:srgbClr val="1A365D"/>
-                </a:solidFill>
-              </a:defRPr>
-            </a:pPr>
-            <a:r>
+            <a:pPr algn="l"/>
+            <a:r>
+              <a:rPr sz="1000" b="0" i="0">
+                <a:solidFill>
+                  <a:srgbClr val="565862"/>
+                </a:solidFill>
+                <a:latin typeface="Arial"/>
+              </a:rPr>
+              <a:t>PERMISSÕES E SEGURANÇA</a:t>
+            </a:r>
+          </a:p>
+        </p:txBody>
+      </p:sp>
+      <p:sp>
+        <p:nvSpPr>
+          <p:cNvPr id="4" name="TextBox 3"/>
+          <p:cNvSpPr txBox="1"/>
+          <p:nvPr/>
+        </p:nvSpPr>
+        <p:spPr>
+          <a:xfrm>
+            <a:off x="667512" y="960120"/>
+            <a:ext cx="10789920" cy="502920"/>
+          </a:xfrm>
+          <a:prstGeom prst="rect">
+            <a:avLst/>
+          </a:prstGeom>
+          <a:noFill/>
+        </p:spPr>
+        <p:txBody>
+          <a:bodyPr wrap="square" lIns="0" tIns="0" rIns="0" bIns="0" anchor="t">
+            <a:spAutoFit/>
+          </a:bodyPr>
+          <a:lstStyle/>
+          <a:p>
+            <a:pPr algn="l"/>
+            <a:r>
+              <a:rPr sz="2700" b="0" i="0">
+                <a:solidFill>
+                  <a:srgbClr val="272934"/>
+                </a:solidFill>
+                <a:latin typeface="Arial"/>
+              </a:rPr>
               <a:t>Clínica-Tech | Permissões e Segurança da Informação</a:t>
             </a:r>
           </a:p>
-          <a:p>
-            <a:pPr>
-              <a:defRPr sz="1600">
-                <a:solidFill>
-                  <a:srgbClr val="0D9488"/>
-                </a:solidFill>
-              </a:defRPr>
-            </a:pPr>
-            <a:r>
+        </p:txBody>
+      </p:sp>
+      <p:sp>
+        <p:nvSpPr>
+          <p:cNvPr id="5" name="TextBox 4"/>
+          <p:cNvSpPr txBox="1"/>
+          <p:nvPr/>
+        </p:nvSpPr>
+        <p:spPr>
+          <a:xfrm>
+            <a:off x="685800" y="1572768"/>
+            <a:ext cx="10607040" cy="292608"/>
+          </a:xfrm>
+          <a:prstGeom prst="rect">
+            <a:avLst/>
+          </a:prstGeom>
+          <a:noFill/>
+        </p:spPr>
+        <p:txBody>
+          <a:bodyPr wrap="square" lIns="0" tIns="0" rIns="0" bIns="0" anchor="t">
+            <a:spAutoFit/>
+          </a:bodyPr>
+          <a:lstStyle/>
+          <a:p>
+            <a:pPr algn="l"/>
+            <a:r>
+              <a:rPr sz="1350" b="0" i="0">
+                <a:solidFill>
+                  <a:srgbClr val="565862"/>
+                </a:solidFill>
+                <a:latin typeface="Arial"/>
+              </a:rPr>
               <a:t>Garantia de acesso mínimo, integridade dos dados e trilha de auditoria</a:t>
             </a:r>
+          </a:p>
+        </p:txBody>
+      </p:sp>
+      <p:sp>
+        <p:nvSpPr>
+          <p:cNvPr id="6" name="Rounded Rectangle 5"/>
+          <p:cNvSpPr/>
+          <p:nvPr/>
+        </p:nvSpPr>
+        <p:spPr>
+          <a:xfrm>
+            <a:off x="658368" y="2121408"/>
+            <a:ext cx="6720840" cy="3858768"/>
+          </a:xfrm>
+          <a:prstGeom prst="roundRect">
+            <a:avLst/>
+          </a:prstGeom>
+          <a:solidFill>
+            <a:srgbClr val="FFFFFF"/>
+          </a:solidFill>
+          <a:ln w="12700">
+            <a:solidFill>
+              <a:srgbClr val="CACBD4"/>
+            </a:solidFill>
+          </a:ln>
+        </p:spPr>
+        <p:style>
+          <a:lnRef idx="1">
+            <a:schemeClr val="accent1"/>
+          </a:lnRef>
+          <a:fillRef idx="3">
+            <a:schemeClr val="accent1"/>
+          </a:fillRef>
+          <a:effectRef idx="2">
+            <a:schemeClr val="accent1"/>
+          </a:effectRef>
+          <a:fontRef idx="minor">
+            <a:schemeClr val="lt1"/>
+          </a:fontRef>
+        </p:style>
+        <p:txBody>
+          <a:bodyPr rtlCol="0" anchor="ctr"/>
+          <a:lstStyle/>
+          <a:p>
+            <a:pPr algn="ctr"/>
+            <a:endParaRPr/>
+          </a:p>
+        </p:txBody>
+      </p:sp>
+      <p:sp>
+        <p:nvSpPr>
+          <p:cNvPr id="7" name="TextBox 6"/>
+          <p:cNvSpPr txBox="1"/>
+          <p:nvPr/>
+        </p:nvSpPr>
+        <p:spPr>
+          <a:xfrm>
+            <a:off x="941832" y="2377440"/>
+            <a:ext cx="4754880" cy="274320"/>
+          </a:xfrm>
+          <a:prstGeom prst="rect">
+            <a:avLst/>
+          </a:prstGeom>
+          <a:noFill/>
+        </p:spPr>
+        <p:txBody>
+          <a:bodyPr wrap="square" lIns="0" tIns="0" rIns="0" bIns="0" anchor="t">
+            <a:spAutoFit/>
+          </a:bodyPr>
+          <a:lstStyle/>
+          <a:p>
+            <a:pPr algn="l"/>
+            <a:r>
+              <a:rPr sz="1800" b="0" i="0">
+                <a:solidFill>
+                  <a:srgbClr val="272934"/>
+                </a:solidFill>
+                <a:latin typeface="Arial"/>
+              </a:rPr>
+              <a:t>Controle de Acesso e Governança</a:t>
+            </a:r>
+          </a:p>
+        </p:txBody>
+      </p:sp>
+      <p:sp>
+        <p:nvSpPr>
+          <p:cNvPr id="8" name="Oval 7"/>
+          <p:cNvSpPr/>
+          <p:nvPr/>
+        </p:nvSpPr>
+        <p:spPr>
+          <a:xfrm>
+            <a:off x="941832" y="2907792"/>
+            <a:ext cx="310896" cy="310896"/>
+          </a:xfrm>
+          <a:prstGeom prst="ellipse">
+            <a:avLst/>
+          </a:prstGeom>
+          <a:solidFill>
+            <a:srgbClr val="DDF4EE"/>
+          </a:solidFill>
+          <a:ln>
+            <a:solidFill>
+              <a:srgbClr val="13B597"/>
+            </a:solidFill>
+          </a:ln>
+        </p:spPr>
+        <p:style>
+          <a:lnRef idx="1">
+            <a:schemeClr val="accent1"/>
+          </a:lnRef>
+          <a:fillRef idx="3">
+            <a:schemeClr val="accent1"/>
+          </a:fillRef>
+          <a:effectRef idx="2">
+            <a:schemeClr val="accent1"/>
+          </a:effectRef>
+          <a:fontRef idx="minor">
+            <a:schemeClr val="lt1"/>
+          </a:fontRef>
+        </p:style>
+        <p:txBody>
+          <a:bodyPr rtlCol="0" anchor="ctr"/>
+          <a:lstStyle/>
+          <a:p>
+            <a:pPr algn="ctr"/>
+            <a:endParaRPr/>
+          </a:p>
+        </p:txBody>
+      </p:sp>
+      <p:sp>
+        <p:nvSpPr>
+          <p:cNvPr id="9" name="TextBox 8"/>
+          <p:cNvSpPr txBox="1"/>
+          <p:nvPr/>
+        </p:nvSpPr>
+        <p:spPr>
+          <a:xfrm>
+            <a:off x="941832" y="2990088"/>
+            <a:ext cx="310896" cy="109728"/>
+          </a:xfrm>
+          <a:prstGeom prst="rect">
+            <a:avLst/>
+          </a:prstGeom>
+          <a:noFill/>
+        </p:spPr>
+        <p:txBody>
+          <a:bodyPr wrap="square" lIns="0" tIns="0" rIns="0" bIns="0" anchor="t">
+            <a:spAutoFit/>
+          </a:bodyPr>
+          <a:lstStyle/>
+          <a:p>
+            <a:pPr algn="ctr"/>
+            <a:r>
+              <a:rPr sz="880" b="1" i="0">
+                <a:solidFill>
+                  <a:srgbClr val="13B597"/>
+                </a:solidFill>
+                <a:latin typeface="Arial"/>
+              </a:rPr>
+              <a:t>1</a:t>
+            </a:r>
+          </a:p>
+        </p:txBody>
+      </p:sp>
+      <p:sp>
+        <p:nvSpPr>
+          <p:cNvPr id="10" name="TextBox 9"/>
+          <p:cNvSpPr txBox="1"/>
+          <p:nvPr/>
+        </p:nvSpPr>
+        <p:spPr>
+          <a:xfrm>
+            <a:off x="1399032" y="2889504"/>
+            <a:ext cx="5440680" cy="256032"/>
+          </a:xfrm>
+          <a:prstGeom prst="rect">
+            <a:avLst/>
+          </a:prstGeom>
+          <a:noFill/>
+        </p:spPr>
+        <p:txBody>
+          <a:bodyPr wrap="square" lIns="0" tIns="0" rIns="0" bIns="0">
+            <a:spAutoFit/>
+          </a:bodyPr>
+          <a:lstStyle/>
+          <a:p>
+            <a:r>
+              <a:rPr sz="1120" b="1">
+                <a:solidFill>
+                  <a:srgbClr val="272934"/>
+                </a:solidFill>
+                <a:latin typeface="Arial"/>
+              </a:rPr>
+              <a:t>Autenticação Individual:</a:t>
+            </a:r>
+          </a:p>
+        </p:txBody>
+      </p:sp>
+      <p:sp>
+        <p:nvSpPr>
+          <p:cNvPr id="11" name="TextBox 10"/>
+          <p:cNvSpPr txBox="1"/>
+          <p:nvPr/>
+        </p:nvSpPr>
+        <p:spPr>
+          <a:xfrm>
+            <a:off x="1399032" y="3163824"/>
+            <a:ext cx="5440680" cy="384048"/>
+          </a:xfrm>
+          <a:prstGeom prst="rect">
+            <a:avLst/>
+          </a:prstGeom>
+          <a:noFill/>
+        </p:spPr>
+        <p:txBody>
+          <a:bodyPr wrap="square" lIns="0" tIns="0" rIns="0" bIns="0" anchor="t">
+            <a:spAutoFit/>
+          </a:bodyPr>
+          <a:lstStyle/>
+          <a:p>
+            <a:pPr algn="l"/>
+            <a:r>
+              <a:rPr sz="960" b="0" i="0">
+                <a:solidFill>
+                  <a:srgbClr val="565862"/>
+                </a:solidFill>
+                <a:latin typeface="Arial"/>
+              </a:rPr>
+              <a:t>Acesso restrito ao ambiente administrativo com credenciais únicas.</a:t>
+            </a:r>
+          </a:p>
+        </p:txBody>
+      </p:sp>
+      <p:sp>
+        <p:nvSpPr>
+          <p:cNvPr id="12" name="Oval 11"/>
+          <p:cNvSpPr/>
+          <p:nvPr/>
+        </p:nvSpPr>
+        <p:spPr>
+          <a:xfrm>
+            <a:off x="941832" y="3630168"/>
+            <a:ext cx="310896" cy="310896"/>
+          </a:xfrm>
+          <a:prstGeom prst="ellipse">
+            <a:avLst/>
+          </a:prstGeom>
+          <a:solidFill>
+            <a:srgbClr val="DDF4EE"/>
+          </a:solidFill>
+          <a:ln>
+            <a:solidFill>
+              <a:srgbClr val="13B597"/>
+            </a:solidFill>
+          </a:ln>
+        </p:spPr>
+        <p:style>
+          <a:lnRef idx="1">
+            <a:schemeClr val="accent1"/>
+          </a:lnRef>
+          <a:fillRef idx="3">
+            <a:schemeClr val="accent1"/>
+          </a:fillRef>
+          <a:effectRef idx="2">
+            <a:schemeClr val="accent1"/>
+          </a:effectRef>
+          <a:fontRef idx="minor">
+            <a:schemeClr val="lt1"/>
+          </a:fontRef>
+        </p:style>
+        <p:txBody>
+          <a:bodyPr rtlCol="0" anchor="ctr"/>
+          <a:lstStyle/>
+          <a:p>
+            <a:pPr algn="ctr"/>
+            <a:endParaRPr/>
+          </a:p>
+        </p:txBody>
+      </p:sp>
+      <p:sp>
+        <p:nvSpPr>
+          <p:cNvPr id="13" name="TextBox 12"/>
+          <p:cNvSpPr txBox="1"/>
+          <p:nvPr/>
+        </p:nvSpPr>
+        <p:spPr>
+          <a:xfrm>
+            <a:off x="941832" y="3712464"/>
+            <a:ext cx="310896" cy="109728"/>
+          </a:xfrm>
+          <a:prstGeom prst="rect">
+            <a:avLst/>
+          </a:prstGeom>
+          <a:noFill/>
+        </p:spPr>
+        <p:txBody>
+          <a:bodyPr wrap="square" lIns="0" tIns="0" rIns="0" bIns="0" anchor="t">
+            <a:spAutoFit/>
+          </a:bodyPr>
+          <a:lstStyle/>
+          <a:p>
+            <a:pPr algn="ctr"/>
+            <a:r>
+              <a:rPr sz="880" b="1" i="0">
+                <a:solidFill>
+                  <a:srgbClr val="13B597"/>
+                </a:solidFill>
+                <a:latin typeface="Arial"/>
+              </a:rPr>
+              <a:t>2</a:t>
+            </a:r>
+          </a:p>
+        </p:txBody>
+      </p:sp>
+      <p:sp>
+        <p:nvSpPr>
+          <p:cNvPr id="14" name="TextBox 13"/>
+          <p:cNvSpPr txBox="1"/>
+          <p:nvPr/>
+        </p:nvSpPr>
+        <p:spPr>
+          <a:xfrm>
+            <a:off x="1399032" y="3611880"/>
+            <a:ext cx="5440680" cy="256032"/>
+          </a:xfrm>
+          <a:prstGeom prst="rect">
+            <a:avLst/>
+          </a:prstGeom>
+          <a:noFill/>
+        </p:spPr>
+        <p:txBody>
+          <a:bodyPr wrap="square" lIns="0" tIns="0" rIns="0" bIns="0">
+            <a:spAutoFit/>
+          </a:bodyPr>
+          <a:lstStyle/>
+          <a:p>
+            <a:r>
+              <a:rPr sz="1120" b="1">
+                <a:solidFill>
+                  <a:srgbClr val="272934"/>
+                </a:solidFill>
+                <a:latin typeface="Arial"/>
+              </a:rPr>
+              <a:t>Autorização por Perfil:</a:t>
+            </a:r>
+          </a:p>
+        </p:txBody>
+      </p:sp>
+      <p:sp>
+        <p:nvSpPr>
+          <p:cNvPr id="15" name="TextBox 14"/>
+          <p:cNvSpPr txBox="1"/>
+          <p:nvPr/>
+        </p:nvSpPr>
+        <p:spPr>
+          <a:xfrm>
+            <a:off x="1399032" y="3886200"/>
+            <a:ext cx="5440680" cy="384048"/>
+          </a:xfrm>
+          <a:prstGeom prst="rect">
+            <a:avLst/>
+          </a:prstGeom>
+          <a:noFill/>
+        </p:spPr>
+        <p:txBody>
+          <a:bodyPr wrap="square" lIns="0" tIns="0" rIns="0" bIns="0" anchor="t">
+            <a:spAutoFit/>
+          </a:bodyPr>
+          <a:lstStyle/>
+          <a:p>
+            <a:pPr algn="l"/>
+            <a:r>
+              <a:rPr sz="960" b="0" i="0">
+                <a:solidFill>
+                  <a:srgbClr val="565862"/>
+                </a:solidFill>
+                <a:latin typeface="Arial"/>
+              </a:rPr>
+              <a:t>Gerente restrito à sua unidade; secretária agenda na rede; profissional visualiza apenas sua agenda.</a:t>
+            </a:r>
+          </a:p>
+        </p:txBody>
+      </p:sp>
+      <p:sp>
+        <p:nvSpPr>
+          <p:cNvPr id="16" name="Oval 15"/>
+          <p:cNvSpPr/>
+          <p:nvPr/>
+        </p:nvSpPr>
+        <p:spPr>
+          <a:xfrm>
+            <a:off x="941832" y="4352544"/>
+            <a:ext cx="310896" cy="310896"/>
+          </a:xfrm>
+          <a:prstGeom prst="ellipse">
+            <a:avLst/>
+          </a:prstGeom>
+          <a:solidFill>
+            <a:srgbClr val="DDF4EE"/>
+          </a:solidFill>
+          <a:ln>
+            <a:solidFill>
+              <a:srgbClr val="13B597"/>
+            </a:solidFill>
+          </a:ln>
+        </p:spPr>
+        <p:style>
+          <a:lnRef idx="1">
+            <a:schemeClr val="accent1"/>
+          </a:lnRef>
+          <a:fillRef idx="3">
+            <a:schemeClr val="accent1"/>
+          </a:fillRef>
+          <a:effectRef idx="2">
+            <a:schemeClr val="accent1"/>
+          </a:effectRef>
+          <a:fontRef idx="minor">
+            <a:schemeClr val="lt1"/>
+          </a:fontRef>
+        </p:style>
+        <p:txBody>
+          <a:bodyPr rtlCol="0" anchor="ctr"/>
+          <a:lstStyle/>
+          <a:p>
+            <a:pPr algn="ctr"/>
+            <a:endParaRPr/>
+          </a:p>
+        </p:txBody>
+      </p:sp>
+      <p:sp>
+        <p:nvSpPr>
+          <p:cNvPr id="17" name="TextBox 16"/>
+          <p:cNvSpPr txBox="1"/>
+          <p:nvPr/>
+        </p:nvSpPr>
+        <p:spPr>
+          <a:xfrm>
+            <a:off x="941832" y="4434840"/>
+            <a:ext cx="310896" cy="109728"/>
+          </a:xfrm>
+          <a:prstGeom prst="rect">
+            <a:avLst/>
+          </a:prstGeom>
+          <a:noFill/>
+        </p:spPr>
+        <p:txBody>
+          <a:bodyPr wrap="square" lIns="0" tIns="0" rIns="0" bIns="0" anchor="t">
+            <a:spAutoFit/>
+          </a:bodyPr>
+          <a:lstStyle/>
+          <a:p>
+            <a:pPr algn="ctr"/>
+            <a:r>
+              <a:rPr sz="880" b="1" i="0">
+                <a:solidFill>
+                  <a:srgbClr val="13B597"/>
+                </a:solidFill>
+                <a:latin typeface="Arial"/>
+              </a:rPr>
+              <a:t>3</a:t>
+            </a:r>
+          </a:p>
+        </p:txBody>
+      </p:sp>
+      <p:sp>
+        <p:nvSpPr>
+          <p:cNvPr id="18" name="TextBox 17"/>
+          <p:cNvSpPr txBox="1"/>
+          <p:nvPr/>
+        </p:nvSpPr>
+        <p:spPr>
+          <a:xfrm>
+            <a:off x="1399032" y="4334256"/>
+            <a:ext cx="5440680" cy="256032"/>
+          </a:xfrm>
+          <a:prstGeom prst="rect">
+            <a:avLst/>
+          </a:prstGeom>
+          <a:noFill/>
+        </p:spPr>
+        <p:txBody>
+          <a:bodyPr wrap="square" lIns="0" tIns="0" rIns="0" bIns="0">
+            <a:spAutoFit/>
+          </a:bodyPr>
+          <a:lstStyle/>
+          <a:p>
+            <a:r>
+              <a:rPr sz="1120" b="1">
+                <a:solidFill>
+                  <a:srgbClr val="272934"/>
+                </a:solidFill>
+                <a:latin typeface="Arial"/>
+              </a:rPr>
+              <a:t>Privacidade por Padrão:</a:t>
+            </a:r>
+          </a:p>
+        </p:txBody>
+      </p:sp>
+      <p:sp>
+        <p:nvSpPr>
+          <p:cNvPr id="19" name="TextBox 18"/>
+          <p:cNvSpPr txBox="1"/>
+          <p:nvPr/>
+        </p:nvSpPr>
+        <p:spPr>
+          <a:xfrm>
+            <a:off x="1399032" y="4608576"/>
+            <a:ext cx="5440680" cy="384048"/>
+          </a:xfrm>
+          <a:prstGeom prst="rect">
+            <a:avLst/>
+          </a:prstGeom>
+          <a:noFill/>
+        </p:spPr>
+        <p:txBody>
+          <a:bodyPr wrap="square" lIns="0" tIns="0" rIns="0" bIns="0" anchor="t">
+            <a:spAutoFit/>
+          </a:bodyPr>
+          <a:lstStyle/>
+          <a:p>
+            <a:pPr algn="l"/>
+            <a:r>
+              <a:rPr sz="960" b="0" i="0">
+                <a:solidFill>
+                  <a:srgbClr val="565862"/>
+                </a:solidFill>
+                <a:latin typeface="Arial"/>
+              </a:rPr>
+              <a:t>Paciente agenda sem login; dados coletados são apenas os estritamente necessários (nome, CPF, nascimento, fone).</a:t>
+            </a:r>
+          </a:p>
+        </p:txBody>
+      </p:sp>
+      <p:sp>
+        <p:nvSpPr>
+          <p:cNvPr id="20" name="Oval 19"/>
+          <p:cNvSpPr/>
+          <p:nvPr/>
+        </p:nvSpPr>
+        <p:spPr>
+          <a:xfrm>
+            <a:off x="941832" y="5074920"/>
+            <a:ext cx="310896" cy="310896"/>
+          </a:xfrm>
+          <a:prstGeom prst="ellipse">
+            <a:avLst/>
+          </a:prstGeom>
+          <a:solidFill>
+            <a:srgbClr val="DDF4EE"/>
+          </a:solidFill>
+          <a:ln>
+            <a:solidFill>
+              <a:srgbClr val="13B597"/>
+            </a:solidFill>
+          </a:ln>
+        </p:spPr>
+        <p:style>
+          <a:lnRef idx="1">
+            <a:schemeClr val="accent1"/>
+          </a:lnRef>
+          <a:fillRef idx="3">
+            <a:schemeClr val="accent1"/>
+          </a:fillRef>
+          <a:effectRef idx="2">
+            <a:schemeClr val="accent1"/>
+          </a:effectRef>
+          <a:fontRef idx="minor">
+            <a:schemeClr val="lt1"/>
+          </a:fontRef>
+        </p:style>
+        <p:txBody>
+          <a:bodyPr rtlCol="0" anchor="ctr"/>
+          <a:lstStyle/>
+          <a:p>
+            <a:pPr algn="ctr"/>
+            <a:endParaRPr/>
+          </a:p>
+        </p:txBody>
+      </p:sp>
+      <p:sp>
+        <p:nvSpPr>
+          <p:cNvPr id="21" name="TextBox 20"/>
+          <p:cNvSpPr txBox="1"/>
+          <p:nvPr/>
+        </p:nvSpPr>
+        <p:spPr>
+          <a:xfrm>
+            <a:off x="941832" y="5157216"/>
+            <a:ext cx="310896" cy="109728"/>
+          </a:xfrm>
+          <a:prstGeom prst="rect">
+            <a:avLst/>
+          </a:prstGeom>
+          <a:noFill/>
+        </p:spPr>
+        <p:txBody>
+          <a:bodyPr wrap="square" lIns="0" tIns="0" rIns="0" bIns="0" anchor="t">
+            <a:spAutoFit/>
+          </a:bodyPr>
+          <a:lstStyle/>
+          <a:p>
+            <a:pPr algn="ctr"/>
+            <a:r>
+              <a:rPr sz="880" b="1" i="0">
+                <a:solidFill>
+                  <a:srgbClr val="13B597"/>
+                </a:solidFill>
+                <a:latin typeface="Arial"/>
+              </a:rPr>
+              <a:t>4</a:t>
+            </a:r>
+          </a:p>
+        </p:txBody>
+      </p:sp>
+      <p:sp>
+        <p:nvSpPr>
+          <p:cNvPr id="22" name="TextBox 21"/>
+          <p:cNvSpPr txBox="1"/>
+          <p:nvPr/>
+        </p:nvSpPr>
+        <p:spPr>
+          <a:xfrm>
+            <a:off x="1399032" y="5056632"/>
+            <a:ext cx="5440680" cy="256032"/>
+          </a:xfrm>
+          <a:prstGeom prst="rect">
+            <a:avLst/>
+          </a:prstGeom>
+          <a:noFill/>
+        </p:spPr>
+        <p:txBody>
+          <a:bodyPr wrap="square" lIns="0" tIns="0" rIns="0" bIns="0">
+            <a:spAutoFit/>
+          </a:bodyPr>
+          <a:lstStyle/>
+          <a:p>
+            <a:r>
+              <a:rPr sz="1120" b="1">
+                <a:solidFill>
+                  <a:srgbClr val="272934"/>
+                </a:solidFill>
+                <a:latin typeface="Arial"/>
+              </a:rPr>
+              <a:t>Trilha de Auditoria:</a:t>
+            </a:r>
+          </a:p>
+        </p:txBody>
+      </p:sp>
+      <p:sp>
+        <p:nvSpPr>
+          <p:cNvPr id="23" name="TextBox 22"/>
+          <p:cNvSpPr txBox="1"/>
+          <p:nvPr/>
+        </p:nvSpPr>
+        <p:spPr>
+          <a:xfrm>
+            <a:off x="1399032" y="5330952"/>
+            <a:ext cx="5440680" cy="384048"/>
+          </a:xfrm>
+          <a:prstGeom prst="rect">
+            <a:avLst/>
+          </a:prstGeom>
+          <a:noFill/>
+        </p:spPr>
+        <p:txBody>
+          <a:bodyPr wrap="square" lIns="0" tIns="0" rIns="0" bIns="0" anchor="t">
+            <a:spAutoFit/>
+          </a:bodyPr>
+          <a:lstStyle/>
+          <a:p>
+            <a:pPr algn="l"/>
+            <a:r>
+              <a:rPr sz="960" b="0" i="0">
+                <a:solidFill>
+                  <a:srgbClr val="565862"/>
+                </a:solidFill>
+                <a:latin typeface="Arial"/>
+              </a:rPr>
+              <a:t>Registro de usuário e data em qualquer cancelamento, remarcação ou alteração relevante.</a:t>
+            </a:r>
+          </a:p>
+        </p:txBody>
+      </p:sp>
+      <p:sp>
+        <p:nvSpPr>
+          <p:cNvPr id="24" name="Rounded Rectangle 23"/>
+          <p:cNvSpPr/>
+          <p:nvPr/>
+        </p:nvSpPr>
+        <p:spPr>
+          <a:xfrm>
+            <a:off x="7635240" y="2121408"/>
+            <a:ext cx="3840480" cy="3858768"/>
+          </a:xfrm>
+          <a:prstGeom prst="roundRect">
+            <a:avLst/>
+          </a:prstGeom>
+          <a:solidFill>
+            <a:srgbClr val="F1F1F5"/>
+          </a:solidFill>
+          <a:ln w="12700">
+            <a:solidFill>
+              <a:srgbClr val="CACBD4"/>
+            </a:solidFill>
+          </a:ln>
+        </p:spPr>
+        <p:style>
+          <a:lnRef idx="1">
+            <a:schemeClr val="accent1"/>
+          </a:lnRef>
+          <a:fillRef idx="3">
+            <a:schemeClr val="accent1"/>
+          </a:fillRef>
+          <a:effectRef idx="2">
+            <a:schemeClr val="accent1"/>
+          </a:effectRef>
+          <a:fontRef idx="minor">
+            <a:schemeClr val="lt1"/>
+          </a:fontRef>
+        </p:style>
+        <p:txBody>
+          <a:bodyPr rtlCol="0" anchor="ctr"/>
+          <a:lstStyle/>
+          <a:p>
+            <a:pPr algn="ctr"/>
+            <a:endParaRPr/>
+          </a:p>
+        </p:txBody>
+      </p:sp>
+      <p:sp>
+        <p:nvSpPr>
+          <p:cNvPr id="25" name="TextBox 24"/>
+          <p:cNvSpPr txBox="1"/>
+          <p:nvPr/>
+        </p:nvSpPr>
+        <p:spPr>
+          <a:xfrm>
+            <a:off x="7936992" y="2377440"/>
+            <a:ext cx="3182112" cy="502920"/>
+          </a:xfrm>
+          <a:prstGeom prst="rect">
+            <a:avLst/>
+          </a:prstGeom>
+          <a:noFill/>
+        </p:spPr>
+        <p:txBody>
+          <a:bodyPr wrap="square" lIns="0" tIns="0" rIns="0" bIns="0" anchor="t">
+            <a:spAutoFit/>
+          </a:bodyPr>
+          <a:lstStyle/>
+          <a:p>
+            <a:pPr algn="l"/>
+            <a:r>
+              <a:rPr sz="1730" b="0" i="0">
+                <a:solidFill>
+                  <a:srgbClr val="272934"/>
+                </a:solidFill>
+                <a:latin typeface="Arial"/>
+              </a:rPr>
+              <a:t>Impacto da Solução &amp; Postura Técnica</a:t>
+            </a:r>
+          </a:p>
+        </p:txBody>
+      </p:sp>
+      <p:sp>
+        <p:nvSpPr>
+          <p:cNvPr id="26" name="Rounded Rectangle 25"/>
+          <p:cNvSpPr/>
+          <p:nvPr/>
+        </p:nvSpPr>
+        <p:spPr>
+          <a:xfrm>
+            <a:off x="7936992" y="3182112"/>
+            <a:ext cx="146304" cy="146304"/>
+          </a:xfrm>
+          <a:prstGeom prst="roundRect">
+            <a:avLst/>
+          </a:prstGeom>
+          <a:solidFill>
+            <a:srgbClr val="13B597"/>
+          </a:solidFill>
+          <a:ln>
+            <a:noFill/>
+          </a:ln>
+        </p:spPr>
+        <p:style>
+          <a:lnRef idx="1">
+            <a:schemeClr val="accent1"/>
+          </a:lnRef>
+          <a:fillRef idx="3">
+            <a:schemeClr val="accent1"/>
+          </a:fillRef>
+          <a:effectRef idx="2">
+            <a:schemeClr val="accent1"/>
+          </a:effectRef>
+          <a:fontRef idx="minor">
+            <a:schemeClr val="lt1"/>
+          </a:fontRef>
+        </p:style>
+        <p:txBody>
+          <a:bodyPr rtlCol="0" anchor="ctr"/>
+          <a:lstStyle/>
+          <a:p>
+            <a:pPr algn="ctr"/>
+            <a:endParaRPr/>
+          </a:p>
+        </p:txBody>
+      </p:sp>
+      <p:sp>
+        <p:nvSpPr>
+          <p:cNvPr id="27" name="TextBox 26"/>
+          <p:cNvSpPr txBox="1"/>
+          <p:nvPr/>
+        </p:nvSpPr>
+        <p:spPr>
+          <a:xfrm>
+            <a:off x="8220456" y="3145536"/>
+            <a:ext cx="2816352" cy="228600"/>
+          </a:xfrm>
+          <a:prstGeom prst="rect">
+            <a:avLst/>
+          </a:prstGeom>
+          <a:noFill/>
+        </p:spPr>
+        <p:txBody>
+          <a:bodyPr wrap="square" lIns="0" tIns="0" rIns="0" bIns="0">
+            <a:spAutoFit/>
+          </a:bodyPr>
+          <a:lstStyle/>
+          <a:p>
+            <a:r>
+              <a:rPr sz="1090" b="1">
+                <a:solidFill>
+                  <a:srgbClr val="272934"/>
+                </a:solidFill>
+                <a:latin typeface="Arial"/>
+              </a:rPr>
+              <a:t>Operação Robusta:</a:t>
+            </a:r>
+          </a:p>
+        </p:txBody>
+      </p:sp>
+      <p:sp>
+        <p:nvSpPr>
+          <p:cNvPr id="28" name="TextBox 27"/>
+          <p:cNvSpPr txBox="1"/>
+          <p:nvPr/>
+        </p:nvSpPr>
+        <p:spPr>
+          <a:xfrm>
+            <a:off x="8220456" y="3401568"/>
+            <a:ext cx="2816352" cy="502920"/>
+          </a:xfrm>
+          <a:prstGeom prst="rect">
+            <a:avLst/>
+          </a:prstGeom>
+          <a:noFill/>
+        </p:spPr>
+        <p:txBody>
+          <a:bodyPr wrap="square" lIns="0" tIns="0" rIns="0" bIns="0" anchor="t">
+            <a:spAutoFit/>
+          </a:bodyPr>
+          <a:lstStyle/>
+          <a:p>
+            <a:pPr algn="l"/>
+            <a:r>
+              <a:rPr sz="930" b="0" i="0">
+                <a:solidFill>
+                  <a:srgbClr val="565862"/>
+                </a:solidFill>
+                <a:latin typeface="Arial"/>
+              </a:rPr>
+              <a:t>O back-end blinda o sistema contra furos de agenda, sobreposições e acessos não autorizados.</a:t>
+            </a:r>
+          </a:p>
+        </p:txBody>
+      </p:sp>
+      <p:sp>
+        <p:nvSpPr>
+          <p:cNvPr id="29" name="Rounded Rectangle 28"/>
+          <p:cNvSpPr/>
+          <p:nvPr/>
+        </p:nvSpPr>
+        <p:spPr>
+          <a:xfrm>
+            <a:off x="7936992" y="4059935"/>
+            <a:ext cx="146304" cy="146304"/>
+          </a:xfrm>
+          <a:prstGeom prst="roundRect">
+            <a:avLst/>
+          </a:prstGeom>
+          <a:solidFill>
+            <a:srgbClr val="13B597"/>
+          </a:solidFill>
+          <a:ln>
+            <a:noFill/>
+          </a:ln>
+        </p:spPr>
+        <p:style>
+          <a:lnRef idx="1">
+            <a:schemeClr val="accent1"/>
+          </a:lnRef>
+          <a:fillRef idx="3">
+            <a:schemeClr val="accent1"/>
+          </a:fillRef>
+          <a:effectRef idx="2">
+            <a:schemeClr val="accent1"/>
+          </a:effectRef>
+          <a:fontRef idx="minor">
+            <a:schemeClr val="lt1"/>
+          </a:fontRef>
+        </p:style>
+        <p:txBody>
+          <a:bodyPr rtlCol="0" anchor="ctr"/>
+          <a:lstStyle/>
+          <a:p>
+            <a:pPr algn="ctr"/>
+            <a:endParaRPr/>
+          </a:p>
+        </p:txBody>
+      </p:sp>
+      <p:sp>
+        <p:nvSpPr>
+          <p:cNvPr id="30" name="TextBox 29"/>
+          <p:cNvSpPr txBox="1"/>
+          <p:nvPr/>
+        </p:nvSpPr>
+        <p:spPr>
+          <a:xfrm>
+            <a:off x="8220456" y="4023359"/>
+            <a:ext cx="2816352" cy="228600"/>
+          </a:xfrm>
+          <a:prstGeom prst="rect">
+            <a:avLst/>
+          </a:prstGeom>
+          <a:noFill/>
+        </p:spPr>
+        <p:txBody>
+          <a:bodyPr wrap="square" lIns="0" tIns="0" rIns="0" bIns="0">
+            <a:spAutoFit/>
+          </a:bodyPr>
+          <a:lstStyle/>
+          <a:p>
+            <a:r>
+              <a:rPr sz="1090" b="1">
+                <a:solidFill>
+                  <a:srgbClr val="272934"/>
+                </a:solidFill>
+                <a:latin typeface="Arial"/>
+              </a:rPr>
+              <a:t>Resiliência Operacional:</a:t>
+            </a:r>
+          </a:p>
+        </p:txBody>
+      </p:sp>
+      <p:sp>
+        <p:nvSpPr>
+          <p:cNvPr id="31" name="TextBox 30"/>
+          <p:cNvSpPr txBox="1"/>
+          <p:nvPr/>
+        </p:nvSpPr>
+        <p:spPr>
+          <a:xfrm>
+            <a:off x="8220456" y="4279392"/>
+            <a:ext cx="2816352" cy="502920"/>
+          </a:xfrm>
+          <a:prstGeom prst="rect">
+            <a:avLst/>
+          </a:prstGeom>
+          <a:noFill/>
+        </p:spPr>
+        <p:txBody>
+          <a:bodyPr wrap="square" lIns="0" tIns="0" rIns="0" bIns="0" anchor="t">
+            <a:spAutoFit/>
+          </a:bodyPr>
+          <a:lstStyle/>
+          <a:p>
+            <a:pPr algn="l"/>
+            <a:r>
+              <a:rPr sz="930" b="0" i="0">
+                <a:solidFill>
+                  <a:srgbClr val="565862"/>
+                </a:solidFill>
+                <a:latin typeface="Arial"/>
+              </a:rPr>
+              <a:t>Mesmo sob oscilações, a integridade da base e os backups garantem a continuidade dos atendimentos.</a:t>
+            </a:r>
+          </a:p>
+        </p:txBody>
+      </p:sp>
+      <p:sp>
+        <p:nvSpPr>
+          <p:cNvPr id="32" name="Rounded Rectangle 31"/>
+          <p:cNvSpPr/>
+          <p:nvPr/>
+        </p:nvSpPr>
+        <p:spPr>
+          <a:xfrm>
+            <a:off x="7936992" y="4937760"/>
+            <a:ext cx="146304" cy="146304"/>
+          </a:xfrm>
+          <a:prstGeom prst="roundRect">
+            <a:avLst/>
+          </a:prstGeom>
+          <a:solidFill>
+            <a:srgbClr val="13B597"/>
+          </a:solidFill>
+          <a:ln>
+            <a:noFill/>
+          </a:ln>
+        </p:spPr>
+        <p:style>
+          <a:lnRef idx="1">
+            <a:schemeClr val="accent1"/>
+          </a:lnRef>
+          <a:fillRef idx="3">
+            <a:schemeClr val="accent1"/>
+          </a:fillRef>
+          <a:effectRef idx="2">
+            <a:schemeClr val="accent1"/>
+          </a:effectRef>
+          <a:fontRef idx="minor">
+            <a:schemeClr val="lt1"/>
+          </a:fontRef>
+        </p:style>
+        <p:txBody>
+          <a:bodyPr rtlCol="0" anchor="ctr"/>
+          <a:lstStyle/>
+          <a:p>
+            <a:pPr algn="ctr"/>
+            <a:endParaRPr/>
+          </a:p>
+        </p:txBody>
+      </p:sp>
+      <p:sp>
+        <p:nvSpPr>
+          <p:cNvPr id="33" name="TextBox 32"/>
+          <p:cNvSpPr txBox="1"/>
+          <p:nvPr/>
+        </p:nvSpPr>
+        <p:spPr>
+          <a:xfrm>
+            <a:off x="8220456" y="4901184"/>
+            <a:ext cx="2816352" cy="228600"/>
+          </a:xfrm>
+          <a:prstGeom prst="rect">
+            <a:avLst/>
+          </a:prstGeom>
+          <a:noFill/>
+        </p:spPr>
+        <p:txBody>
+          <a:bodyPr wrap="square" lIns="0" tIns="0" rIns="0" bIns="0">
+            <a:spAutoFit/>
+          </a:bodyPr>
+          <a:lstStyle/>
+          <a:p>
+            <a:r>
+              <a:rPr sz="1090" b="1">
+                <a:solidFill>
+                  <a:srgbClr val="272934"/>
+                </a:solidFill>
+                <a:latin typeface="Arial"/>
+              </a:rPr>
+              <a:t>Destaque Profissional:</a:t>
+            </a:r>
+          </a:p>
+        </p:txBody>
+      </p:sp>
+      <p:sp>
+        <p:nvSpPr>
+          <p:cNvPr id="34" name="TextBox 33"/>
+          <p:cNvSpPr txBox="1"/>
+          <p:nvPr/>
+        </p:nvSpPr>
+        <p:spPr>
+          <a:xfrm>
+            <a:off x="8220456" y="5157216"/>
+            <a:ext cx="2816352" cy="502920"/>
+          </a:xfrm>
+          <a:prstGeom prst="rect">
+            <a:avLst/>
+          </a:prstGeom>
+          <a:noFill/>
+        </p:spPr>
+        <p:txBody>
+          <a:bodyPr wrap="square" lIns="0" tIns="0" rIns="0" bIns="0" anchor="t">
+            <a:spAutoFit/>
+          </a:bodyPr>
+          <a:lstStyle/>
+          <a:p>
+            <a:pPr algn="l"/>
+            <a:r>
+              <a:rPr sz="930" b="0" i="0">
+                <a:solidFill>
+                  <a:srgbClr val="565862"/>
+                </a:solidFill>
+                <a:latin typeface="Arial"/>
+              </a:rPr>
+              <a:t>Compartilhamento no LinkedIn sobre os desafios de projetar fluxos transacionais consistentes e controle de acesso rigoroso para serviços de saúde.</a:t>
+            </a:r>
+          </a:p>
+        </p:txBody>
+      </p:sp>
+      <p:cxnSp>
+        <p:nvCxnSpPr>
+          <p:cNvPr id="35" name="Connector 34"/>
+          <p:cNvCxnSpPr/>
+          <p:nvPr/>
+        </p:nvCxnSpPr>
+        <p:spPr>
+          <a:xfrm>
+            <a:off x="621792" y="6501384"/>
+            <a:ext cx="11146536" cy="0"/>
+          </a:xfrm>
+          <a:prstGeom prst="line">
+            <a:avLst/>
+          </a:prstGeom>
+          <a:ln w="10160">
+            <a:solidFill>
+              <a:srgbClr val="CACBD4"/>
+            </a:solidFill>
+          </a:ln>
+        </p:spPr>
+        <p:style>
+          <a:lnRef idx="2">
+            <a:schemeClr val="accent1"/>
+          </a:lnRef>
+          <a:fillRef idx="0">
+            <a:schemeClr val="accent1"/>
+          </a:fillRef>
+          <a:effectRef idx="1">
+            <a:schemeClr val="accent1"/>
+          </a:effectRef>
+          <a:fontRef idx="minor">
+            <a:schemeClr val="tx1"/>
+          </a:fontRef>
+        </p:style>
+      </p:cxnSp>
+      <p:sp>
+        <p:nvSpPr>
+          <p:cNvPr id="36" name="TextBox 35"/>
+          <p:cNvSpPr txBox="1"/>
+          <p:nvPr/>
+        </p:nvSpPr>
+        <p:spPr>
+          <a:xfrm>
+            <a:off x="630936" y="6547104"/>
+            <a:ext cx="3657600" cy="146304"/>
+          </a:xfrm>
+          <a:prstGeom prst="rect">
+            <a:avLst/>
+          </a:prstGeom>
+          <a:noFill/>
+        </p:spPr>
+        <p:txBody>
+          <a:bodyPr wrap="square" lIns="0" tIns="0" rIns="0" bIns="0" anchor="t">
+            <a:spAutoFit/>
+          </a:bodyPr>
+          <a:lstStyle/>
+          <a:p>
+            <a:pPr algn="l"/>
+            <a:r>
+              <a:rPr sz="900" b="0" i="0">
+                <a:solidFill>
+                  <a:srgbClr val="787984"/>
+                </a:solidFill>
+                <a:latin typeface="Arial"/>
+              </a:rPr>
+              <a:t>Clínica-Tech · Projeto de Perfil Profissional</a:t>
+            </a:r>
+          </a:p>
+        </p:txBody>
+      </p:sp>
+      <p:sp>
+        <p:nvSpPr>
+          <p:cNvPr id="37" name="TextBox 36"/>
+          <p:cNvSpPr txBox="1"/>
+          <p:nvPr/>
+        </p:nvSpPr>
+        <p:spPr>
+          <a:xfrm>
+            <a:off x="11521440" y="6547104"/>
+            <a:ext cx="256032" cy="146304"/>
+          </a:xfrm>
+          <a:prstGeom prst="rect">
+            <a:avLst/>
+          </a:prstGeom>
+          <a:noFill/>
+        </p:spPr>
+        <p:txBody>
+          <a:bodyPr wrap="square" lIns="0" tIns="0" rIns="0" bIns="0" anchor="t">
+            <a:spAutoFit/>
+          </a:bodyPr>
+          <a:lstStyle/>
+          <a:p>
+            <a:pPr algn="r"/>
+            <a:r>
+              <a:rPr sz="900" b="0" i="0">
+                <a:solidFill>
+                  <a:srgbClr val="787984"/>
+                </a:solidFill>
+                <a:latin typeface="Arial"/>
+              </a:rPr>
+              <a:t>16</a:t>
+            </a:r>
+          </a:p>
+        </p:txBody>
+      </p:sp>
+    </p:spTree>
+  </p:cSld>
+  <p:clrMapOvr>
+    <a:masterClrMapping/>
+  </p:clrMapOvr>
+</p:sld>
+</file>
+
+<file path=ppt/slides/slide3.xml><?xml version="1.0" encoding="utf-8"?>
+<p:sld xmlns:a="http://schemas.openxmlformats.org/drawingml/2006/main" xmlns:r="http://schemas.openxmlformats.org/officeDocument/2006/relationships" xmlns:p="http://schemas.openxmlformats.org/presentationml/2006/main">
+  <p:cSld>
+    <p:bg>
+      <p:bgPr>
+        <a:solidFill>
+          <a:srgbClr val="F9F9FB"/>
+        </a:solidFill>
+        <a:effectLst/>
+      </p:bgPr>
+    </p:bg>
+    <p:spTree>
+      <p:nvGrpSpPr>
+        <p:cNvPr id="1" name=""/>
+        <p:cNvGrpSpPr/>
+        <p:nvPr/>
+      </p:nvGrpSpPr>
+      <p:grpSpPr>
+        <a:xfrm>
+          <a:off x="0" y="0"/>
+          <a:ext cx="0" cy="0"/>
+          <a:chOff x="0" y="0"/>
+          <a:chExt cx="0" cy="0"/>
+        </a:xfrm>
+      </p:grpSpPr>
+      <p:sp>
+        <p:nvSpPr>
+          <p:cNvPr id="2" name="Rounded Rectangle 1"/>
+          <p:cNvSpPr/>
+          <p:nvPr/>
+        </p:nvSpPr>
+        <p:spPr>
+          <a:xfrm>
+            <a:off x="658368" y="438912"/>
+            <a:ext cx="2514600" cy="310896"/>
+          </a:xfrm>
+          <a:prstGeom prst="roundRect">
+            <a:avLst/>
+          </a:prstGeom>
+          <a:solidFill>
+            <a:srgbClr val="E7E7EE"/>
+          </a:solidFill>
+          <a:ln>
+            <a:noFill/>
+          </a:ln>
+        </p:spPr>
+        <p:style>
+          <a:lnRef idx="1">
+            <a:schemeClr val="accent1"/>
+          </a:lnRef>
+          <a:fillRef idx="3">
+            <a:schemeClr val="accent1"/>
+          </a:fillRef>
+          <a:effectRef idx="2">
+            <a:schemeClr val="accent1"/>
+          </a:effectRef>
+          <a:fontRef idx="minor">
+            <a:schemeClr val="lt1"/>
+          </a:fontRef>
+        </p:style>
+        <p:txBody>
+          <a:bodyPr rtlCol="0" anchor="ctr"/>
+          <a:lstStyle/>
+          <a:p>
+            <a:pPr algn="ctr"/>
+            <a:endParaRPr/>
           </a:p>
         </p:txBody>
       </p:sp>
@@ -3360,8 +6401,8 @@
         </p:nvSpPr>
         <p:spPr>
           <a:xfrm>
-            <a:off x="731520" y="1737360"/>
-            <a:ext cx="5120640" cy="4572000"/>
+            <a:off x="768096" y="507492"/>
+            <a:ext cx="2240280" cy="146304"/>
           </a:xfrm>
           <a:prstGeom prst="rect">
             <a:avLst/>
@@ -3369,112 +6410,20 @@
           <a:noFill/>
         </p:spPr>
         <p:txBody>
-          <a:bodyPr wrap="square">
+          <a:bodyPr wrap="square" lIns="0" tIns="0" rIns="0" bIns="0" anchor="t">
             <a:spAutoFit/>
           </a:bodyPr>
           <a:lstStyle/>
           <a:p>
-            <a:pPr>
-              <a:defRPr sz="1800" b="1">
-                <a:solidFill>
-                  <a:srgbClr val="1E293B"/>
-                </a:solidFill>
-              </a:defRPr>
-            </a:pPr>
-            <a:r>
-              <a:t>Controle de Acesso e Governança</a:t>
-            </a:r>
-          </a:p>
-          <a:p>
-            <a:pPr>
-              <a:spcBef>
-                <a:spcPts val="800"/>
-              </a:spcBef>
-            </a:pPr>
-            <a:r>
-              <a:rPr b="1" sz="1300">
-                <a:solidFill>
-                  <a:srgbClr val="1A365D"/>
-                </a:solidFill>
+            <a:pPr algn="l"/>
+            <a:r>
+              <a:rPr sz="1000" b="0" i="0">
+                <a:solidFill>
+                  <a:srgbClr val="565862"/>
+                </a:solidFill>
+                <a:latin typeface="Arial"/>
               </a:rPr>
-              <a:t>• Autenticação Individual: </a:t>
-            </a:r>
-            <a:r>
-              <a:rPr sz="1300">
-                <a:solidFill>
-                  <a:srgbClr val="1E293B"/>
-                </a:solidFill>
-              </a:rPr>
-              <a:t>Acesso restrito ao ambiente administrativo com credenciais únicas.</a:t>
-            </a:r>
-          </a:p>
-          <a:p>
-            <a:pPr>
-              <a:spcBef>
-                <a:spcPts val="800"/>
-              </a:spcBef>
-            </a:pPr>
-            <a:r>
-              <a:rPr b="1" sz="1300">
-                <a:solidFill>
-                  <a:srgbClr val="1A365D"/>
-                </a:solidFill>
-              </a:rPr>
-              <a:t>• Autorização por Perfil: </a:t>
-            </a:r>
-            <a:r>
-              <a:rPr sz="1300">
-                <a:solidFill>
-                  <a:srgbClr val="1E293B"/>
-                </a:solidFill>
-              </a:rPr>
-              <a:t>Gerente restrito à sua unidade; secretária agenda na rede; profissional visualiza apenas sua agenda.</a:t>
-            </a:r>
-          </a:p>
-          <a:p>
-            <a:pPr>
-              <a:spcBef>
-                <a:spcPts val="800"/>
-              </a:spcBef>
-            </a:pPr>
-            <a:r>
-              <a:rPr b="1" sz="1300">
-                <a:solidFill>
-                  <a:srgbClr val="1A365D"/>
-                </a:solidFill>
-              </a:rPr>
-              <a:t>• Privacidade por Padrão: </a:t>
-            </a:r>
-            <a:r>
-              <a:rPr sz="1300">
-                <a:solidFill>
-                  <a:srgbClr val="1E293B"/>
-                </a:solidFill>
-              </a:rPr>
-              <a:t>Paciente agenda sem login; dados coletados são apenas os estritamente necessários (nome, CPF, nascimento, fone).</a:t>
-            </a:r>
-          </a:p>
-          <a:p>
-            <a:pPr>
-              <a:spcBef>
-                <a:spcPts val="800"/>
-              </a:spcBef>
-            </a:pPr>
-            <a:r>
-              <a:rPr b="1" sz="1300">
-                <a:solidFill>
-                  <a:srgbClr val="1A365D"/>
-                </a:solidFill>
-              </a:rPr>
-              <a:t>• Trilha de Auditoria: </a:t>
-            </a:r>
-            <a:r>
-              <a:rPr sz="1300">
-                <a:solidFill>
-                  <a:srgbClr val="1E293B"/>
-                </a:solidFill>
-              </a:rPr>
-              <a:t>Registro de usuário e data em qualquer cancelamento, remarcação ou alteração relevante.</a:t>
+              <a:t>LINKEDIN</a:t>
             </a:r>
           </a:p>
         </p:txBody>
@@ -3487,8 +6436,8 @@
         </p:nvSpPr>
         <p:spPr>
           <a:xfrm>
-            <a:off x="6217920" y="1737360"/>
-            <a:ext cx="5212080" cy="4572000"/>
+            <a:off x="667512" y="969264"/>
+            <a:ext cx="10789920" cy="502920"/>
           </a:xfrm>
           <a:prstGeom prst="rect">
             <a:avLst/>
@@ -3496,89 +6445,1126 @@
           <a:noFill/>
         </p:spPr>
         <p:txBody>
-          <a:bodyPr wrap="square">
+          <a:bodyPr wrap="square" lIns="0" tIns="0" rIns="0" bIns="0" anchor="t">
             <a:spAutoFit/>
           </a:bodyPr>
           <a:lstStyle/>
           <a:p>
-            <a:pPr>
-              <a:defRPr sz="1800" b="1">
-                <a:solidFill>
-                  <a:srgbClr val="1E293B"/>
-                </a:solidFill>
-              </a:defRPr>
-            </a:pPr>
-            <a:r>
-              <a:t>Impacto da Solução &amp; Postura Técnica</a:t>
-            </a:r>
-          </a:p>
-          <a:p>
-            <a:pPr>
-              <a:spcBef>
-                <a:spcPts val="1000"/>
-              </a:spcBef>
-            </a:pPr>
-            <a:r>
-              <a:rPr b="1" sz="1300">
-                <a:solidFill>
-                  <a:srgbClr val="1A365D"/>
-                </a:solidFill>
+            <a:pPr algn="l"/>
+            <a:r>
+              <a:rPr sz="2800" b="0" i="0">
+                <a:solidFill>
+                  <a:srgbClr val="272934"/>
+                </a:solidFill>
+                <a:latin typeface="Arial"/>
               </a:rPr>
-              <a:t>• Operação Robusta: </a:t>
-            </a:r>
-            <a:r>
-              <a:rPr sz="1300">
-                <a:solidFill>
-                  <a:srgbClr val="1E293B"/>
-                </a:solidFill>
+              <a:t>Proposta de postagem profissional</a:t>
+            </a:r>
+          </a:p>
+        </p:txBody>
+      </p:sp>
+      <p:sp>
+        <p:nvSpPr>
+          <p:cNvPr id="5" name="Rounded Rectangle 4"/>
+          <p:cNvSpPr/>
+          <p:nvPr/>
+        </p:nvSpPr>
+        <p:spPr>
+          <a:xfrm>
+            <a:off x="932688" y="1847088"/>
+            <a:ext cx="7479792" cy="4224528"/>
+          </a:xfrm>
+          <a:prstGeom prst="roundRect">
+            <a:avLst/>
+          </a:prstGeom>
+          <a:solidFill>
+            <a:srgbClr val="FFFFFF"/>
+          </a:solidFill>
+          <a:ln w="12700">
+            <a:solidFill>
+              <a:srgbClr val="CACBD4"/>
+            </a:solidFill>
+          </a:ln>
+        </p:spPr>
+        <p:style>
+          <a:lnRef idx="1">
+            <a:schemeClr val="accent1"/>
+          </a:lnRef>
+          <a:fillRef idx="3">
+            <a:schemeClr val="accent1"/>
+          </a:fillRef>
+          <a:effectRef idx="2">
+            <a:schemeClr val="accent1"/>
+          </a:effectRef>
+          <a:fontRef idx="minor">
+            <a:schemeClr val="lt1"/>
+          </a:fontRef>
+        </p:style>
+        <p:txBody>
+          <a:bodyPr rtlCol="0" anchor="ctr"/>
+          <a:lstStyle/>
+          <a:p>
+            <a:pPr algn="ctr"/>
+            <a:endParaRPr/>
+          </a:p>
+        </p:txBody>
+      </p:sp>
+      <p:sp>
+        <p:nvSpPr>
+          <p:cNvPr id="6" name="Oval 5"/>
+          <p:cNvSpPr/>
+          <p:nvPr/>
+        </p:nvSpPr>
+        <p:spPr>
+          <a:xfrm>
+            <a:off x="1261872" y="2148840"/>
+            <a:ext cx="566928" cy="566928"/>
+          </a:xfrm>
+          <a:prstGeom prst="ellipse">
+            <a:avLst/>
+          </a:prstGeom>
+          <a:solidFill>
+            <a:srgbClr val="E9EEF4"/>
+          </a:solidFill>
+          <a:ln>
+            <a:solidFill>
+              <a:srgbClr val="CACBD4"/>
+            </a:solidFill>
+          </a:ln>
+        </p:spPr>
+        <p:style>
+          <a:lnRef idx="1">
+            <a:schemeClr val="accent1"/>
+          </a:lnRef>
+          <a:fillRef idx="3">
+            <a:schemeClr val="accent1"/>
+          </a:fillRef>
+          <a:effectRef idx="2">
+            <a:schemeClr val="accent1"/>
+          </a:effectRef>
+          <a:fontRef idx="minor">
+            <a:schemeClr val="lt1"/>
+          </a:fontRef>
+        </p:style>
+        <p:txBody>
+          <a:bodyPr rtlCol="0" anchor="ctr"/>
+          <a:lstStyle/>
+          <a:p>
+            <a:pPr algn="ctr"/>
+            <a:endParaRPr/>
+          </a:p>
+        </p:txBody>
+      </p:sp>
+      <p:sp>
+        <p:nvSpPr>
+          <p:cNvPr id="7" name="TextBox 6"/>
+          <p:cNvSpPr txBox="1"/>
+          <p:nvPr/>
+        </p:nvSpPr>
+        <p:spPr>
+          <a:xfrm>
+            <a:off x="1993392" y="2176272"/>
+            <a:ext cx="3108960" cy="210312"/>
+          </a:xfrm>
+          <a:prstGeom prst="rect">
+            <a:avLst/>
+          </a:prstGeom>
+          <a:noFill/>
+        </p:spPr>
+        <p:txBody>
+          <a:bodyPr wrap="square" lIns="0" tIns="0" rIns="0" bIns="0" anchor="t">
+            <a:spAutoFit/>
+          </a:bodyPr>
+          <a:lstStyle/>
+          <a:p>
+            <a:pPr algn="l"/>
+            <a:r>
+              <a:rPr sz="1550" b="1" i="0">
+                <a:solidFill>
+                  <a:srgbClr val="272934"/>
+                </a:solidFill>
+                <a:latin typeface="Arial"/>
               </a:rPr>
-              <a:t>O back-end blinda o sistema contra furos de agenda, sobreposições e acessos não autorizados.</a:t>
-            </a:r>
-          </a:p>
-          <a:p>
-            <a:pPr>
-              <a:spcBef>
-                <a:spcPts val="1000"/>
-              </a:spcBef>
-            </a:pPr>
-            <a:r>
-              <a:rPr b="1" sz="1300">
-                <a:solidFill>
-                  <a:srgbClr val="1A365D"/>
-                </a:solidFill>
+              <a:t>Mateus Brito</a:t>
+            </a:r>
+          </a:p>
+        </p:txBody>
+      </p:sp>
+      <p:sp>
+        <p:nvSpPr>
+          <p:cNvPr id="8" name="TextBox 7"/>
+          <p:cNvSpPr txBox="1"/>
+          <p:nvPr/>
+        </p:nvSpPr>
+        <p:spPr>
+          <a:xfrm>
+            <a:off x="1993392" y="2468880"/>
+            <a:ext cx="3657600" cy="182880"/>
+          </a:xfrm>
+          <a:prstGeom prst="rect">
+            <a:avLst/>
+          </a:prstGeom>
+          <a:noFill/>
+        </p:spPr>
+        <p:txBody>
+          <a:bodyPr wrap="square" lIns="0" tIns="0" rIns="0" bIns="0" anchor="t">
+            <a:spAutoFit/>
+          </a:bodyPr>
+          <a:lstStyle/>
+          <a:p>
+            <a:pPr algn="l"/>
+            <a:r>
+              <a:rPr sz="1080" b="0" i="0">
+                <a:solidFill>
+                  <a:srgbClr val="747681"/>
+                </a:solidFill>
+                <a:latin typeface="Arial"/>
               </a:rPr>
-              <a:t>• Resiliência Operacional: </a:t>
-            </a:r>
-            <a:r>
-              <a:rPr sz="1300">
-                <a:solidFill>
-                  <a:srgbClr val="1E293B"/>
-                </a:solidFill>
+              <a:t>Back-end + Segurança · Clínica-Tech</a:t>
+            </a:r>
+          </a:p>
+        </p:txBody>
+      </p:sp>
+      <p:sp>
+        <p:nvSpPr>
+          <p:cNvPr id="9" name="TextBox 8"/>
+          <p:cNvSpPr txBox="1"/>
+          <p:nvPr/>
+        </p:nvSpPr>
+        <p:spPr>
+          <a:xfrm>
+            <a:off x="7114032" y="2249424"/>
+            <a:ext cx="914400" cy="201168"/>
+          </a:xfrm>
+          <a:prstGeom prst="rect">
+            <a:avLst/>
+          </a:prstGeom>
+          <a:noFill/>
+        </p:spPr>
+        <p:txBody>
+          <a:bodyPr wrap="square" lIns="0" tIns="0" rIns="0" bIns="0" anchor="t">
+            <a:spAutoFit/>
+          </a:bodyPr>
+          <a:lstStyle/>
+          <a:p>
+            <a:pPr algn="r"/>
+            <a:r>
+              <a:rPr sz="1100" b="1" i="0">
+                <a:solidFill>
+                  <a:srgbClr val="0A66C2"/>
+                </a:solidFill>
+                <a:latin typeface="Arial"/>
               </a:rPr>
-              <a:t>Mesmo sob oscilações, a integridade da base e os backups garantem a continuidade dos atendimentos.</a:t>
-            </a:r>
-          </a:p>
-          <a:p>
-            <a:pPr>
-              <a:spcBef>
-                <a:spcPts val="1000"/>
-              </a:spcBef>
-            </a:pPr>
-            <a:r>
-              <a:rPr b="1" sz="1300">
-                <a:solidFill>
-                  <a:srgbClr val="1A365D"/>
-                </a:solidFill>
+              <a:t>+ Seguir</a:t>
+            </a:r>
+          </a:p>
+        </p:txBody>
+      </p:sp>
+      <p:sp>
+        <p:nvSpPr>
+          <p:cNvPr id="10" name="TextBox 9"/>
+          <p:cNvSpPr txBox="1"/>
+          <p:nvPr/>
+        </p:nvSpPr>
+        <p:spPr>
+          <a:xfrm>
+            <a:off x="1298448" y="2962656"/>
+            <a:ext cx="6748272" cy="2615184"/>
+          </a:xfrm>
+          <a:prstGeom prst="rect">
+            <a:avLst/>
+          </a:prstGeom>
+          <a:noFill/>
+        </p:spPr>
+        <p:txBody>
+          <a:bodyPr wrap="square" lIns="0" tIns="0" rIns="0" bIns="0" anchor="t">
+            <a:spAutoFit/>
+          </a:bodyPr>
+          <a:lstStyle/>
+          <a:p>
+            <a:pPr algn="l"/>
+            <a:r>
+              <a:rPr sz="980" b="0" i="0">
+                <a:solidFill>
+                  <a:srgbClr val="4A4C56"/>
+                </a:solidFill>
+                <a:latin typeface="Arial"/>
               </a:rPr>
-              <a:t>• Destaque Profissional: </a:t>
-            </a:r>
-            <a:r>
-              <a:rPr sz="1300">
-                <a:solidFill>
-                  <a:srgbClr val="1E293B"/>
-                </a:solidFill>
+              <a:t>No desenvolvimento de sistemas voltados à saúde, a confiabilidade das regras de negócio e o controle de acesso são tão vitais quanto uma interface intuitiva.
+Recentemente, atuei na arquitetura de Back-end e Segurança da Informação do Clínica-Tech, uma plataforma web integrada ao WhatsApp projetada para centralizar o agendamento de consultas de uma rede com cinco unidades.
+Minha contribuição esteve concentrada em:
+🔹 Integridade e Prevenção de Conflitos: Estruturação de validações para impedir que um mesmo profissional tenha horários sobrepostos em unidades diferentes ou reservas concorrentes no mesmo instante.
+🔹 Controle de Acesso Baseado em Perfis (RBAC): Garantia de privilégios mínimos entre secretárias, profissionais e gestores, mantendo a operação das unidades devidamente isolada.
+🔹 Privacidade e Minimização de Dados: Aplicação de práticas alinhadas à LGPD, coletando apenas dados indispensáveis ao agendamento e implementando trilhas de auditoria para operações críticas.
+Projetar sistemas seguros e resilientes é um exercício constante de equilíbrio entre experiência do usuário e consistência transacional.
+#Backend #SegurancaDaInformacao #SoftwareEngineering #LGPD #SistemasDeSaude #WebDevelopment</a:t>
+            </a:r>
+          </a:p>
+        </p:txBody>
+      </p:sp>
+      <p:cxnSp>
+        <p:nvCxnSpPr>
+          <p:cNvPr id="11" name="Connector 10"/>
+          <p:cNvCxnSpPr/>
+          <p:nvPr/>
+        </p:nvCxnSpPr>
+        <p:spPr>
+          <a:xfrm>
+            <a:off x="1261872" y="5632704"/>
+            <a:ext cx="6821424" cy="0"/>
+          </a:xfrm>
+          <a:prstGeom prst="line">
+            <a:avLst/>
+          </a:prstGeom>
+          <a:ln w="10160">
+            <a:solidFill>
+              <a:srgbClr val="DEDFE5"/>
+            </a:solidFill>
+          </a:ln>
+        </p:spPr>
+        <p:style>
+          <a:lnRef idx="2">
+            <a:schemeClr val="accent1"/>
+          </a:lnRef>
+          <a:fillRef idx="0">
+            <a:schemeClr val="accent1"/>
+          </a:fillRef>
+          <a:effectRef idx="1">
+            <a:schemeClr val="accent1"/>
+          </a:effectRef>
+          <a:fontRef idx="minor">
+            <a:schemeClr val="tx1"/>
+          </a:fontRef>
+        </p:style>
+      </p:cxnSp>
+      <p:sp>
+        <p:nvSpPr>
+          <p:cNvPr id="12" name="TextBox 11"/>
+          <p:cNvSpPr txBox="1"/>
+          <p:nvPr/>
+        </p:nvSpPr>
+        <p:spPr>
+          <a:xfrm>
+            <a:off x="2514600" y="5742432"/>
+            <a:ext cx="914400" cy="164592"/>
+          </a:xfrm>
+          <a:prstGeom prst="rect">
+            <a:avLst/>
+          </a:prstGeom>
+          <a:noFill/>
+        </p:spPr>
+        <p:txBody>
+          <a:bodyPr wrap="square" lIns="0" tIns="0" rIns="0" bIns="0" anchor="t">
+            <a:spAutoFit/>
+          </a:bodyPr>
+          <a:lstStyle/>
+          <a:p>
+            <a:pPr algn="ctr"/>
+            <a:r>
+              <a:rPr sz="960" b="0" i="0">
+                <a:solidFill>
+                  <a:srgbClr val="272934"/>
+                </a:solidFill>
+                <a:latin typeface="Arial"/>
               </a:rPr>
-              <a:t>Compartilhamento no LinkedIn sobre os desafios de projetar fluxos transacionais consistentes e controle de acesso rigoroso para serviços de saúde.</a:t>
+              <a:t>Gostar</a:t>
+            </a:r>
+          </a:p>
+        </p:txBody>
+      </p:sp>
+      <p:sp>
+        <p:nvSpPr>
+          <p:cNvPr id="13" name="TextBox 12"/>
+          <p:cNvSpPr txBox="1"/>
+          <p:nvPr/>
+        </p:nvSpPr>
+        <p:spPr>
+          <a:xfrm>
+            <a:off x="3657600" y="5742432"/>
+            <a:ext cx="914400" cy="164592"/>
+          </a:xfrm>
+          <a:prstGeom prst="rect">
+            <a:avLst/>
+          </a:prstGeom>
+          <a:noFill/>
+        </p:spPr>
+        <p:txBody>
+          <a:bodyPr wrap="square" lIns="0" tIns="0" rIns="0" bIns="0" anchor="t">
+            <a:spAutoFit/>
+          </a:bodyPr>
+          <a:lstStyle/>
+          <a:p>
+            <a:pPr algn="ctr"/>
+            <a:r>
+              <a:rPr sz="960" b="0" i="0">
+                <a:solidFill>
+                  <a:srgbClr val="272934"/>
+                </a:solidFill>
+                <a:latin typeface="Arial"/>
+              </a:rPr>
+              <a:t>Comentar</a:t>
+            </a:r>
+          </a:p>
+        </p:txBody>
+      </p:sp>
+      <p:sp>
+        <p:nvSpPr>
+          <p:cNvPr id="14" name="TextBox 13"/>
+          <p:cNvSpPr txBox="1"/>
+          <p:nvPr/>
+        </p:nvSpPr>
+        <p:spPr>
+          <a:xfrm>
+            <a:off x="4983480" y="5742432"/>
+            <a:ext cx="914400" cy="164592"/>
+          </a:xfrm>
+          <a:prstGeom prst="rect">
+            <a:avLst/>
+          </a:prstGeom>
+          <a:noFill/>
+        </p:spPr>
+        <p:txBody>
+          <a:bodyPr wrap="square" lIns="0" tIns="0" rIns="0" bIns="0" anchor="t">
+            <a:spAutoFit/>
+          </a:bodyPr>
+          <a:lstStyle/>
+          <a:p>
+            <a:pPr algn="ctr"/>
+            <a:r>
+              <a:rPr sz="960" b="0" i="0">
+                <a:solidFill>
+                  <a:srgbClr val="272934"/>
+                </a:solidFill>
+                <a:latin typeface="Arial"/>
+              </a:rPr>
+              <a:t>Compartilhar</a:t>
+            </a:r>
+          </a:p>
+        </p:txBody>
+      </p:sp>
+      <p:sp>
+        <p:nvSpPr>
+          <p:cNvPr id="15" name="TextBox 14"/>
+          <p:cNvSpPr txBox="1"/>
+          <p:nvPr/>
+        </p:nvSpPr>
+        <p:spPr>
+          <a:xfrm>
+            <a:off x="6492240" y="5742432"/>
+            <a:ext cx="914400" cy="164592"/>
+          </a:xfrm>
+          <a:prstGeom prst="rect">
+            <a:avLst/>
+          </a:prstGeom>
+          <a:noFill/>
+        </p:spPr>
+        <p:txBody>
+          <a:bodyPr wrap="square" lIns="0" tIns="0" rIns="0" bIns="0" anchor="t">
+            <a:spAutoFit/>
+          </a:bodyPr>
+          <a:lstStyle/>
+          <a:p>
+            <a:pPr algn="ctr"/>
+            <a:r>
+              <a:rPr sz="960" b="0" i="0">
+                <a:solidFill>
+                  <a:srgbClr val="272934"/>
+                </a:solidFill>
+                <a:latin typeface="Arial"/>
+              </a:rPr>
+              <a:t>Enviar</a:t>
+            </a:r>
+          </a:p>
+        </p:txBody>
+      </p:sp>
+      <p:sp>
+        <p:nvSpPr>
+          <p:cNvPr id="16" name="Rounded Rectangle 15"/>
+          <p:cNvSpPr/>
+          <p:nvPr/>
+        </p:nvSpPr>
+        <p:spPr>
+          <a:xfrm>
+            <a:off x="8732520" y="1847088"/>
+            <a:ext cx="2578608" cy="4224528"/>
+          </a:xfrm>
+          <a:prstGeom prst="roundRect">
+            <a:avLst/>
+          </a:prstGeom>
+          <a:solidFill>
+            <a:srgbClr val="F1F1F5"/>
+          </a:solidFill>
+          <a:ln w="12700">
+            <a:solidFill>
+              <a:srgbClr val="CACBD4"/>
+            </a:solidFill>
+          </a:ln>
+        </p:spPr>
+        <p:style>
+          <a:lnRef idx="1">
+            <a:schemeClr val="accent1"/>
+          </a:lnRef>
+          <a:fillRef idx="3">
+            <a:schemeClr val="accent1"/>
+          </a:fillRef>
+          <a:effectRef idx="2">
+            <a:schemeClr val="accent1"/>
+          </a:effectRef>
+          <a:fontRef idx="minor">
+            <a:schemeClr val="lt1"/>
+          </a:fontRef>
+        </p:style>
+        <p:txBody>
+          <a:bodyPr rtlCol="0" anchor="ctr"/>
+          <a:lstStyle/>
+          <a:p>
+            <a:pPr algn="ctr"/>
+            <a:endParaRPr/>
+          </a:p>
+        </p:txBody>
+      </p:sp>
+      <p:sp>
+        <p:nvSpPr>
+          <p:cNvPr id="17" name="TextBox 16"/>
+          <p:cNvSpPr txBox="1"/>
+          <p:nvPr/>
+        </p:nvSpPr>
+        <p:spPr>
+          <a:xfrm>
+            <a:off x="9034272" y="2212848"/>
+            <a:ext cx="1920240" cy="274320"/>
+          </a:xfrm>
+          <a:prstGeom prst="rect">
+            <a:avLst/>
+          </a:prstGeom>
+          <a:noFill/>
+        </p:spPr>
+        <p:txBody>
+          <a:bodyPr wrap="square" lIns="0" tIns="0" rIns="0" bIns="0" anchor="t">
+            <a:spAutoFit/>
+          </a:bodyPr>
+          <a:lstStyle/>
+          <a:p>
+            <a:pPr algn="l"/>
+            <a:r>
+              <a:rPr sz="1800" b="0" i="0">
+                <a:solidFill>
+                  <a:srgbClr val="272934"/>
+                </a:solidFill>
+                <a:latin typeface="Arial"/>
+              </a:rPr>
+              <a:t>O post contempla</a:t>
+            </a:r>
+          </a:p>
+        </p:txBody>
+      </p:sp>
+      <p:sp>
+        <p:nvSpPr>
+          <p:cNvPr id="18" name="Diamond 17"/>
+          <p:cNvSpPr/>
+          <p:nvPr/>
+        </p:nvSpPr>
+        <p:spPr>
+          <a:xfrm>
+            <a:off x="9025128" y="2852928"/>
+            <a:ext cx="283464" cy="283464"/>
+          </a:xfrm>
+          <a:prstGeom prst="diamond">
+            <a:avLst/>
+          </a:prstGeom>
+          <a:solidFill>
+            <a:srgbClr val="DDF4EE"/>
+          </a:solidFill>
+          <a:ln>
+            <a:solidFill>
+              <a:srgbClr val="13B597"/>
+            </a:solidFill>
+          </a:ln>
+        </p:spPr>
+        <p:style>
+          <a:lnRef idx="1">
+            <a:schemeClr val="accent1"/>
+          </a:lnRef>
+          <a:fillRef idx="3">
+            <a:schemeClr val="accent1"/>
+          </a:fillRef>
+          <a:effectRef idx="2">
+            <a:schemeClr val="accent1"/>
+          </a:effectRef>
+          <a:fontRef idx="minor">
+            <a:schemeClr val="lt1"/>
+          </a:fontRef>
+        </p:style>
+        <p:txBody>
+          <a:bodyPr rtlCol="0" anchor="ctr"/>
+          <a:lstStyle/>
+          <a:p>
+            <a:pPr algn="ctr"/>
+            <a:endParaRPr/>
+          </a:p>
+        </p:txBody>
+      </p:sp>
+      <p:sp>
+        <p:nvSpPr>
+          <p:cNvPr id="19" name="TextBox 18"/>
+          <p:cNvSpPr txBox="1"/>
+          <p:nvPr/>
+        </p:nvSpPr>
+        <p:spPr>
+          <a:xfrm>
+            <a:off x="9418320" y="2843784"/>
+            <a:ext cx="1591056" cy="256032"/>
+          </a:xfrm>
+          <a:prstGeom prst="rect">
+            <a:avLst/>
+          </a:prstGeom>
+          <a:noFill/>
+        </p:spPr>
+        <p:txBody>
+          <a:bodyPr wrap="square" lIns="0" tIns="0" rIns="0" bIns="0" anchor="t">
+            <a:spAutoFit/>
+          </a:bodyPr>
+          <a:lstStyle/>
+          <a:p>
+            <a:pPr algn="l"/>
+            <a:r>
+              <a:rPr sz="1010" b="1" i="0">
+                <a:solidFill>
+                  <a:srgbClr val="272934"/>
+                </a:solidFill>
+                <a:latin typeface="Arial"/>
+              </a:rPr>
+              <a:t>Integridade e Prevenção de Conflitos</a:t>
+            </a:r>
+          </a:p>
+        </p:txBody>
+      </p:sp>
+      <p:sp>
+        <p:nvSpPr>
+          <p:cNvPr id="20" name="TextBox 19"/>
+          <p:cNvSpPr txBox="1"/>
+          <p:nvPr/>
+        </p:nvSpPr>
+        <p:spPr>
+          <a:xfrm>
+            <a:off x="9418320" y="3163824"/>
+            <a:ext cx="1591056" cy="310896"/>
+          </a:xfrm>
+          <a:prstGeom prst="rect">
+            <a:avLst/>
+          </a:prstGeom>
+          <a:noFill/>
+        </p:spPr>
+        <p:txBody>
+          <a:bodyPr wrap="square" lIns="0" tIns="0" rIns="0" bIns="0" anchor="t">
+            <a:spAutoFit/>
+          </a:bodyPr>
+          <a:lstStyle/>
+          <a:p>
+            <a:pPr algn="l"/>
+            <a:r>
+              <a:rPr sz="900" b="0" i="0">
+                <a:solidFill>
+                  <a:srgbClr val="565862"/>
+                </a:solidFill>
+                <a:latin typeface="Arial"/>
+              </a:rPr>
+              <a:t>reservas concorrentes e horários sobrepostos</a:t>
+            </a:r>
+          </a:p>
+        </p:txBody>
+      </p:sp>
+      <p:sp>
+        <p:nvSpPr>
+          <p:cNvPr id="21" name="Hexagon 20"/>
+          <p:cNvSpPr/>
+          <p:nvPr/>
+        </p:nvSpPr>
+        <p:spPr>
+          <a:xfrm>
+            <a:off x="9025128" y="3639312"/>
+            <a:ext cx="283464" cy="283464"/>
+          </a:xfrm>
+          <a:prstGeom prst="hexagon">
+            <a:avLst/>
+          </a:prstGeom>
+          <a:solidFill>
+            <a:srgbClr val="DDF4EE"/>
+          </a:solidFill>
+          <a:ln>
+            <a:solidFill>
+              <a:srgbClr val="13B597"/>
+            </a:solidFill>
+          </a:ln>
+        </p:spPr>
+        <p:style>
+          <a:lnRef idx="1">
+            <a:schemeClr val="accent1"/>
+          </a:lnRef>
+          <a:fillRef idx="3">
+            <a:schemeClr val="accent1"/>
+          </a:fillRef>
+          <a:effectRef idx="2">
+            <a:schemeClr val="accent1"/>
+          </a:effectRef>
+          <a:fontRef idx="minor">
+            <a:schemeClr val="lt1"/>
+          </a:fontRef>
+        </p:style>
+        <p:txBody>
+          <a:bodyPr rtlCol="0" anchor="ctr"/>
+          <a:lstStyle/>
+          <a:p>
+            <a:pPr algn="ctr"/>
+            <a:endParaRPr/>
+          </a:p>
+        </p:txBody>
+      </p:sp>
+      <p:sp>
+        <p:nvSpPr>
+          <p:cNvPr id="22" name="TextBox 21"/>
+          <p:cNvSpPr txBox="1"/>
+          <p:nvPr/>
+        </p:nvSpPr>
+        <p:spPr>
+          <a:xfrm>
+            <a:off x="9418320" y="3630168"/>
+            <a:ext cx="1591056" cy="256032"/>
+          </a:xfrm>
+          <a:prstGeom prst="rect">
+            <a:avLst/>
+          </a:prstGeom>
+          <a:noFill/>
+        </p:spPr>
+        <p:txBody>
+          <a:bodyPr wrap="square" lIns="0" tIns="0" rIns="0" bIns="0" anchor="t">
+            <a:spAutoFit/>
+          </a:bodyPr>
+          <a:lstStyle/>
+          <a:p>
+            <a:pPr algn="l"/>
+            <a:r>
+              <a:rPr sz="1010" b="1" i="0">
+                <a:solidFill>
+                  <a:srgbClr val="272934"/>
+                </a:solidFill>
+                <a:latin typeface="Arial"/>
+              </a:rPr>
+              <a:t>Controle de Acesso Baseado em Perfis (RBAC)</a:t>
+            </a:r>
+          </a:p>
+        </p:txBody>
+      </p:sp>
+      <p:sp>
+        <p:nvSpPr>
+          <p:cNvPr id="23" name="TextBox 22"/>
+          <p:cNvSpPr txBox="1"/>
+          <p:nvPr/>
+        </p:nvSpPr>
+        <p:spPr>
+          <a:xfrm>
+            <a:off x="9418320" y="4105656"/>
+            <a:ext cx="1591056" cy="310896"/>
+          </a:xfrm>
+          <a:prstGeom prst="rect">
+            <a:avLst/>
+          </a:prstGeom>
+          <a:noFill/>
+        </p:spPr>
+        <p:txBody>
+          <a:bodyPr wrap="square" lIns="0" tIns="0" rIns="0" bIns="0" anchor="t">
+            <a:spAutoFit/>
+          </a:bodyPr>
+          <a:lstStyle/>
+          <a:p>
+            <a:pPr algn="l"/>
+            <a:r>
+              <a:rPr sz="900" b="0" i="0" dirty="0" err="1">
+                <a:solidFill>
+                  <a:srgbClr val="565862"/>
+                </a:solidFill>
+                <a:latin typeface="Arial"/>
+              </a:rPr>
+              <a:t>privilégios</a:t>
+            </a:r>
+            <a:r>
+              <a:rPr sz="900" b="0" i="0" dirty="0">
+                <a:solidFill>
+                  <a:srgbClr val="565862"/>
+                </a:solidFill>
+                <a:latin typeface="Arial"/>
+              </a:rPr>
+              <a:t> </a:t>
+            </a:r>
+            <a:r>
+              <a:rPr sz="900" b="0" i="0" dirty="0" err="1">
+                <a:solidFill>
+                  <a:srgbClr val="565862"/>
+                </a:solidFill>
+                <a:latin typeface="Arial"/>
+              </a:rPr>
+              <a:t>mínimos</a:t>
+            </a:r>
+            <a:r>
+              <a:rPr sz="900" b="0" i="0" dirty="0">
+                <a:solidFill>
+                  <a:srgbClr val="565862"/>
+                </a:solidFill>
+                <a:latin typeface="Arial"/>
+              </a:rPr>
+              <a:t> entre </a:t>
+            </a:r>
+            <a:r>
+              <a:rPr sz="900" b="0" i="0" dirty="0" err="1">
+                <a:solidFill>
+                  <a:srgbClr val="565862"/>
+                </a:solidFill>
+                <a:latin typeface="Arial"/>
+              </a:rPr>
+              <a:t>perfis</a:t>
+            </a:r>
+            <a:endParaRPr sz="900" b="0" i="0" dirty="0">
+              <a:solidFill>
+                <a:srgbClr val="565862"/>
+              </a:solidFill>
+              <a:latin typeface="Arial"/>
+            </a:endParaRPr>
+          </a:p>
+        </p:txBody>
+      </p:sp>
+      <p:sp>
+        <p:nvSpPr>
+          <p:cNvPr id="24" name="Oval 23"/>
+          <p:cNvSpPr/>
+          <p:nvPr/>
+        </p:nvSpPr>
+        <p:spPr>
+          <a:xfrm>
+            <a:off x="9025128" y="4425696"/>
+            <a:ext cx="283464" cy="283464"/>
+          </a:xfrm>
+          <a:prstGeom prst="ellipse">
+            <a:avLst/>
+          </a:prstGeom>
+          <a:solidFill>
+            <a:srgbClr val="DDF4EE"/>
+          </a:solidFill>
+          <a:ln>
+            <a:solidFill>
+              <a:srgbClr val="13B597"/>
+            </a:solidFill>
+          </a:ln>
+        </p:spPr>
+        <p:style>
+          <a:lnRef idx="1">
+            <a:schemeClr val="accent1"/>
+          </a:lnRef>
+          <a:fillRef idx="3">
+            <a:schemeClr val="accent1"/>
+          </a:fillRef>
+          <a:effectRef idx="2">
+            <a:schemeClr val="accent1"/>
+          </a:effectRef>
+          <a:fontRef idx="minor">
+            <a:schemeClr val="lt1"/>
+          </a:fontRef>
+        </p:style>
+        <p:txBody>
+          <a:bodyPr rtlCol="0" anchor="ctr"/>
+          <a:lstStyle/>
+          <a:p>
+            <a:pPr algn="ctr"/>
+            <a:endParaRPr/>
+          </a:p>
+        </p:txBody>
+      </p:sp>
+      <p:sp>
+        <p:nvSpPr>
+          <p:cNvPr id="25" name="TextBox 24"/>
+          <p:cNvSpPr txBox="1"/>
+          <p:nvPr/>
+        </p:nvSpPr>
+        <p:spPr>
+          <a:xfrm>
+            <a:off x="9418320" y="4416552"/>
+            <a:ext cx="1591056" cy="256032"/>
+          </a:xfrm>
+          <a:prstGeom prst="rect">
+            <a:avLst/>
+          </a:prstGeom>
+          <a:noFill/>
+        </p:spPr>
+        <p:txBody>
+          <a:bodyPr wrap="square" lIns="0" tIns="0" rIns="0" bIns="0" anchor="t">
+            <a:spAutoFit/>
+          </a:bodyPr>
+          <a:lstStyle/>
+          <a:p>
+            <a:pPr algn="l"/>
+            <a:r>
+              <a:rPr sz="1010" b="1" i="0">
+                <a:solidFill>
+                  <a:srgbClr val="272934"/>
+                </a:solidFill>
+                <a:latin typeface="Arial"/>
+              </a:rPr>
+              <a:t>Privacidade e Minimização de Dados</a:t>
+            </a:r>
+          </a:p>
+        </p:txBody>
+      </p:sp>
+      <p:sp>
+        <p:nvSpPr>
+          <p:cNvPr id="26" name="TextBox 25"/>
+          <p:cNvSpPr txBox="1"/>
+          <p:nvPr/>
+        </p:nvSpPr>
+        <p:spPr>
+          <a:xfrm>
+            <a:off x="9418320" y="4736592"/>
+            <a:ext cx="1591056" cy="310896"/>
+          </a:xfrm>
+          <a:prstGeom prst="rect">
+            <a:avLst/>
+          </a:prstGeom>
+          <a:noFill/>
+        </p:spPr>
+        <p:txBody>
+          <a:bodyPr wrap="square" lIns="0" tIns="0" rIns="0" bIns="0" anchor="t">
+            <a:spAutoFit/>
+          </a:bodyPr>
+          <a:lstStyle/>
+          <a:p>
+            <a:pPr algn="l"/>
+            <a:r>
+              <a:rPr sz="900" b="0" i="0">
+                <a:solidFill>
+                  <a:srgbClr val="565862"/>
+                </a:solidFill>
+                <a:latin typeface="Arial"/>
+              </a:rPr>
+              <a:t>dados indispensáveis e trilhas de auditoria</a:t>
+            </a:r>
+          </a:p>
+        </p:txBody>
+      </p:sp>
+      <p:sp>
+        <p:nvSpPr>
+          <p:cNvPr id="27" name="5-Point Star 26"/>
+          <p:cNvSpPr/>
+          <p:nvPr/>
+        </p:nvSpPr>
+        <p:spPr>
+          <a:xfrm>
+            <a:off x="9025128" y="5212080"/>
+            <a:ext cx="283464" cy="283464"/>
+          </a:xfrm>
+          <a:prstGeom prst="star5">
+            <a:avLst/>
+          </a:prstGeom>
+          <a:solidFill>
+            <a:srgbClr val="DDF4EE"/>
+          </a:solidFill>
+          <a:ln>
+            <a:solidFill>
+              <a:srgbClr val="13B597"/>
+            </a:solidFill>
+          </a:ln>
+        </p:spPr>
+        <p:style>
+          <a:lnRef idx="1">
+            <a:schemeClr val="accent1"/>
+          </a:lnRef>
+          <a:fillRef idx="3">
+            <a:schemeClr val="accent1"/>
+          </a:fillRef>
+          <a:effectRef idx="2">
+            <a:schemeClr val="accent1"/>
+          </a:effectRef>
+          <a:fontRef idx="minor">
+            <a:schemeClr val="lt1"/>
+          </a:fontRef>
+        </p:style>
+        <p:txBody>
+          <a:bodyPr rtlCol="0" anchor="ctr"/>
+          <a:lstStyle/>
+          <a:p>
+            <a:pPr algn="ctr"/>
+            <a:endParaRPr/>
+          </a:p>
+        </p:txBody>
+      </p:sp>
+      <p:sp>
+        <p:nvSpPr>
+          <p:cNvPr id="28" name="TextBox 27"/>
+          <p:cNvSpPr txBox="1"/>
+          <p:nvPr/>
+        </p:nvSpPr>
+        <p:spPr>
+          <a:xfrm>
+            <a:off x="9418320" y="5202936"/>
+            <a:ext cx="1591056" cy="256032"/>
+          </a:xfrm>
+          <a:prstGeom prst="rect">
+            <a:avLst/>
+          </a:prstGeom>
+          <a:noFill/>
+        </p:spPr>
+        <p:txBody>
+          <a:bodyPr wrap="square" lIns="0" tIns="0" rIns="0" bIns="0" anchor="t">
+            <a:spAutoFit/>
+          </a:bodyPr>
+          <a:lstStyle/>
+          <a:p>
+            <a:pPr algn="l"/>
+            <a:r>
+              <a:rPr sz="1010" b="1" i="0">
+                <a:solidFill>
+                  <a:srgbClr val="272934"/>
+                </a:solidFill>
+                <a:latin typeface="Arial"/>
+              </a:rPr>
+              <a:t>Sistemas seguros e resilientes</a:t>
+            </a:r>
+          </a:p>
+        </p:txBody>
+      </p:sp>
+      <p:sp>
+        <p:nvSpPr>
+          <p:cNvPr id="29" name="TextBox 28"/>
+          <p:cNvSpPr txBox="1"/>
+          <p:nvPr/>
+        </p:nvSpPr>
+        <p:spPr>
+          <a:xfrm>
+            <a:off x="9418320" y="5522976"/>
+            <a:ext cx="1591056" cy="310896"/>
+          </a:xfrm>
+          <a:prstGeom prst="rect">
+            <a:avLst/>
+          </a:prstGeom>
+          <a:noFill/>
+        </p:spPr>
+        <p:txBody>
+          <a:bodyPr wrap="square" lIns="0" tIns="0" rIns="0" bIns="0" anchor="t">
+            <a:spAutoFit/>
+          </a:bodyPr>
+          <a:lstStyle/>
+          <a:p>
+            <a:pPr algn="l"/>
+            <a:r>
+              <a:rPr sz="900" b="0" i="0">
+                <a:solidFill>
+                  <a:srgbClr val="565862"/>
+                </a:solidFill>
+                <a:latin typeface="Arial"/>
+              </a:rPr>
+              <a:t>experiência do usuário e consistência transacional</a:t>
+            </a:r>
+          </a:p>
+        </p:txBody>
+      </p:sp>
+      <p:cxnSp>
+        <p:nvCxnSpPr>
+          <p:cNvPr id="30" name="Connector 29"/>
+          <p:cNvCxnSpPr/>
+          <p:nvPr/>
+        </p:nvCxnSpPr>
+        <p:spPr>
+          <a:xfrm>
+            <a:off x="621792" y="6501384"/>
+            <a:ext cx="11146536" cy="0"/>
+          </a:xfrm>
+          <a:prstGeom prst="line">
+            <a:avLst/>
+          </a:prstGeom>
+          <a:ln w="10160">
+            <a:solidFill>
+              <a:srgbClr val="CACBD4"/>
+            </a:solidFill>
+          </a:ln>
+        </p:spPr>
+        <p:style>
+          <a:lnRef idx="2">
+            <a:schemeClr val="accent1"/>
+          </a:lnRef>
+          <a:fillRef idx="0">
+            <a:schemeClr val="accent1"/>
+          </a:fillRef>
+          <a:effectRef idx="1">
+            <a:schemeClr val="accent1"/>
+          </a:effectRef>
+          <a:fontRef idx="minor">
+            <a:schemeClr val="tx1"/>
+          </a:fontRef>
+        </p:style>
+      </p:cxnSp>
+      <p:sp>
+        <p:nvSpPr>
+          <p:cNvPr id="31" name="TextBox 30"/>
+          <p:cNvSpPr txBox="1"/>
+          <p:nvPr/>
+        </p:nvSpPr>
+        <p:spPr>
+          <a:xfrm>
+            <a:off x="630936" y="6547104"/>
+            <a:ext cx="3657600" cy="146304"/>
+          </a:xfrm>
+          <a:prstGeom prst="rect">
+            <a:avLst/>
+          </a:prstGeom>
+          <a:noFill/>
+        </p:spPr>
+        <p:txBody>
+          <a:bodyPr wrap="square" lIns="0" tIns="0" rIns="0" bIns="0" anchor="t">
+            <a:spAutoFit/>
+          </a:bodyPr>
+          <a:lstStyle/>
+          <a:p>
+            <a:pPr algn="l"/>
+            <a:r>
+              <a:rPr sz="900" b="0" i="0">
+                <a:solidFill>
+                  <a:srgbClr val="787984"/>
+                </a:solidFill>
+                <a:latin typeface="Arial"/>
+              </a:rPr>
+              <a:t>Clínica-Tech · Projeto de Perfil Profissional</a:t>
+            </a:r>
+          </a:p>
+        </p:txBody>
+      </p:sp>
+      <p:sp>
+        <p:nvSpPr>
+          <p:cNvPr id="32" name="TextBox 31"/>
+          <p:cNvSpPr txBox="1"/>
+          <p:nvPr/>
+        </p:nvSpPr>
+        <p:spPr>
+          <a:xfrm>
+            <a:off x="11521440" y="6547104"/>
+            <a:ext cx="256032" cy="146304"/>
+          </a:xfrm>
+          <a:prstGeom prst="rect">
+            <a:avLst/>
+          </a:prstGeom>
+          <a:noFill/>
+        </p:spPr>
+        <p:txBody>
+          <a:bodyPr wrap="square" lIns="0" tIns="0" rIns="0" bIns="0" anchor="t">
+            <a:spAutoFit/>
+          </a:bodyPr>
+          <a:lstStyle/>
+          <a:p>
+            <a:pPr algn="r"/>
+            <a:r>
+              <a:rPr sz="900" b="0" i="0">
+                <a:solidFill>
+                  <a:srgbClr val="787984"/>
+                </a:solidFill>
+                <a:latin typeface="Arial"/>
+              </a:rPr>
+              <a:t>17</a:t>
             </a:r>
           </a:p>
         </p:txBody>
